--- a/Prezentacja - Mean-Variance-Portfolio.pptx
+++ b/Prezentacja - Mean-Variance-Portfolio.pptx
@@ -4,6 +4,9 @@
   <p:sldMasterIdLst>
     <p:sldMasterId id="2147483648" r:id="rId1"/>
   </p:sldMasterIdLst>
+  <p:notesMasterIdLst>
+    <p:notesMasterId r:id="rId12"/>
+  </p:notesMasterIdLst>
   <p:sldIdLst>
     <p:sldId id="256" r:id="rId2"/>
     <p:sldId id="257" r:id="rId3"/>
@@ -16,10 +19,7 @@
     <p:sldId id="264" r:id="rId10"/>
     <p:sldId id="265" r:id="rId11"/>
   </p:sldIdLst>
-  <p:notesMasterIdLst>
-    <p:notesMasterId r:id="rId12"/>
-  </p:notesMasterIdLst>
-  <p:sldSz cx="9144000" cy="5143500"/>
+  <p:sldSz cx="9144000" cy="5143500" type="screen16x9"/>
   <p:notesSz cx="5143500" cy="9144000"/>
   <p:defaultTextStyle>
     <a:lvl1pPr marL="0" algn="l" defTabSz="914400" rtl="0" eaLnBrk="1" latinLnBrk="0" hangingPunct="1">
@@ -113,6 +113,11 @@
       </a:defRPr>
     </a:lvl9pPr>
   </p:defaultTextStyle>
+  <p:extLst>
+    <p:ext uri="{EFAFB233-063F-42B5-8137-9DF3F51BA10A}">
+      <p15:sldGuideLst xmlns:p15="http://schemas.microsoft.com/office/powerpoint/2012/main"/>
+    </p:ext>
+  </p:extLst>
 </p:presentation>
 </file>
 
@@ -138,234 +143,10 @@
           <a:chExt cx="0" cy="0"/>
         </a:xfrm>
       </p:grpSpPr>
-      <p:sp>
-        <p:nvSpPr>
-          <p:cNvPr id="2" name="Header Placeholder 1"/>
-          <p:cNvSpPr>
-            <a:spLocks noGrp="1"/>
-          </p:cNvSpPr>
-          <p:nvPr>
-            <p:ph type="hdr" sz="quarter"/>
-          </p:nvPr>
-        </p:nvSpPr>
-        <p:spPr>
-          <a:xfrm>
-            <a:off x="0" y="0"/>
-            <a:ext cx="2971800" cy="458788"/>
-          </a:xfrm>
-          <a:prstGeom prst="rect">
-            <a:avLst/>
-          </a:prstGeom>
-        </p:spPr>
-        <p:txBody>
-          <a:bodyPr vert="horz" lIns="91440" tIns="45720" rIns="91440" bIns="45720" rtlCol="0"/>
-          <a:lstStyle>
-            <a:lvl1pPr algn="l">
-              <a:defRPr sz="1200"/>
-            </a:lvl1pPr>
-          </a:lstStyle>
-          <a:p>
-            <a:endParaRPr lang="en-US"/>
-          </a:p>
-        </p:txBody>
-      </p:sp>
-      <p:sp>
-        <p:nvSpPr>
-          <p:cNvPr id="3" name="Date Placeholder 2"/>
-          <p:cNvSpPr>
-            <a:spLocks noGrp="1"/>
-          </p:cNvSpPr>
-          <p:nvPr>
-            <p:ph type="dt" idx="1"/>
-          </p:nvPr>
-        </p:nvSpPr>
-        <p:spPr>
-          <a:xfrm>
-            <a:off x="3884613" y="0"/>
-            <a:ext cx="2971800" cy="458788"/>
-          </a:xfrm>
-          <a:prstGeom prst="rect">
-            <a:avLst/>
-          </a:prstGeom>
-        </p:spPr>
-        <p:txBody>
-          <a:bodyPr vert="horz" lIns="91440" tIns="45720" rIns="91440" bIns="45720" rtlCol="0"/>
-          <a:lstStyle>
-            <a:lvl1pPr algn="r">
-              <a:defRPr sz="1200"/>
-            </a:lvl1pPr>
-          </a:lstStyle>
-          <a:p>
-            <a:fld id="{5282F153-3F37-0F45-9E97-73ACFA13230C}" type="datetimeFigureOut">
-              <a:rPr lang="en-US"/>
-              <a:t>7/23/19</a:t>
-            </a:fld>
-            <a:endParaRPr lang="en-US"/>
-          </a:p>
-        </p:txBody>
-      </p:sp>
-      <p:sp>
-        <p:nvSpPr>
-          <p:cNvPr id="4" name="Slide Image Placeholder 3"/>
-          <p:cNvSpPr>
-            <a:spLocks noGrp="1" noRot="1" noChangeAspect="1"/>
-          </p:cNvSpPr>
-          <p:nvPr>
-            <p:ph type="sldImg" idx="2"/>
-          </p:nvPr>
-        </p:nvSpPr>
-        <p:spPr>
-          <a:xfrm>
-            <a:off x="685800" y="1143000"/>
-            <a:ext cx="5486400" cy="3086100"/>
-          </a:xfrm>
-          <a:prstGeom prst="rect">
-            <a:avLst/>
-          </a:prstGeom>
-          <a:noFill/>
-          <a:ln w="12700">
-            <a:solidFill>
-              <a:prstClr val="black"/>
-            </a:solidFill>
-          </a:ln>
-        </p:spPr>
-        <p:txBody>
-          <a:bodyPr vert="horz" lIns="91440" tIns="45720" rIns="91440" bIns="45720" rtlCol="0" anchor="ctr"/>
-          <a:lstStyle/>
-          <a:p>
-            <a:endParaRPr lang="en-US"/>
-          </a:p>
-        </p:txBody>
-      </p:sp>
-      <p:sp>
-        <p:nvSpPr>
-          <p:cNvPr id="5" name="Notes Placeholder 4"/>
-          <p:cNvSpPr>
-            <a:spLocks noGrp="1"/>
-          </p:cNvSpPr>
-          <p:nvPr>
-            <p:ph type="body" sz="quarter" idx="3"/>
-          </p:nvPr>
-        </p:nvSpPr>
-        <p:spPr>
-          <a:xfrm>
-            <a:off x="685800" y="4400550"/>
-            <a:ext cx="5486400" cy="3600450"/>
-          </a:xfrm>
-          <a:prstGeom prst="rect">
-            <a:avLst/>
-          </a:prstGeom>
-        </p:spPr>
-        <p:txBody>
-          <a:bodyPr vert="horz" lIns="91440" tIns="45720" rIns="91440" bIns="45720" rtlCol="0"/>
-          <a:lstStyle/>
-          <a:p>
-            <a:pPr lvl="0"/>
-            <a:r>
-              <a:rPr lang="en-US"/>
-              <a:t>Click to edit Master text styles</a:t>
-            </a:r>
-          </a:p>
-          <a:p>
-            <a:pPr lvl="1"/>
-            <a:r>
-              <a:rPr lang="en-US"/>
-              <a:t>Second level</a:t>
-            </a:r>
-          </a:p>
-          <a:p>
-            <a:pPr lvl="2"/>
-            <a:r>
-              <a:rPr lang="en-US"/>
-              <a:t>Third level</a:t>
-            </a:r>
-          </a:p>
-          <a:p>
-            <a:pPr lvl="3"/>
-            <a:r>
-              <a:rPr lang="en-US"/>
-              <a:t>Fourth level</a:t>
-            </a:r>
-          </a:p>
-          <a:p>
-            <a:pPr lvl="4"/>
-            <a:r>
-              <a:rPr lang="en-US"/>
-              <a:t>Fifth level</a:t>
-            </a:r>
-          </a:p>
-        </p:txBody>
-      </p:sp>
-      <p:sp>
-        <p:nvSpPr>
-          <p:cNvPr id="6" name="Footer Placeholder 5"/>
-          <p:cNvSpPr>
-            <a:spLocks noGrp="1"/>
-          </p:cNvSpPr>
-          <p:nvPr>
-            <p:ph type="ftr" sz="quarter" idx="4"/>
-          </p:nvPr>
-        </p:nvSpPr>
-        <p:spPr>
-          <a:xfrm>
-            <a:off x="0" y="8685213"/>
-            <a:ext cx="2971800" cy="458787"/>
-          </a:xfrm>
-          <a:prstGeom prst="rect">
-            <a:avLst/>
-          </a:prstGeom>
-        </p:spPr>
-        <p:txBody>
-          <a:bodyPr vert="horz" lIns="91440" tIns="45720" rIns="91440" bIns="45720" rtlCol="0" anchor="b"/>
-          <a:lstStyle>
-            <a:lvl1pPr algn="l">
-              <a:defRPr sz="1200"/>
-            </a:lvl1pPr>
-          </a:lstStyle>
-          <a:p>
-            <a:endParaRPr lang="en-US"/>
-          </a:p>
-        </p:txBody>
-      </p:sp>
-      <p:sp>
-        <p:nvSpPr>
-          <p:cNvPr id="7" name="Slide Number Placeholder 6"/>
-          <p:cNvSpPr>
-            <a:spLocks noGrp="1"/>
-          </p:cNvSpPr>
-          <p:nvPr>
-            <p:ph type="sldNum" sz="quarter" idx="5"/>
-          </p:nvPr>
-        </p:nvSpPr>
-        <p:spPr>
-          <a:xfrm>
-            <a:off x="3884613" y="8685213"/>
-            <a:ext cx="2971800" cy="458787"/>
-          </a:xfrm>
-          <a:prstGeom prst="rect">
-            <a:avLst/>
-          </a:prstGeom>
-        </p:spPr>
-        <p:txBody>
-          <a:bodyPr vert="horz" lIns="91440" tIns="45720" rIns="91440" bIns="45720" rtlCol="0" anchor="b"/>
-          <a:lstStyle>
-            <a:lvl1pPr algn="r">
-              <a:defRPr sz="1200"/>
-            </a:lvl1pPr>
-          </a:lstStyle>
-          <a:p>
-            <a:fld id="{CE5E9CC1-C706-0F49-92D6-E571CC5EEA8F}" type="slidenum">
-              <a:rPr lang="en-US"/>
-              <a:t>‹#›</a:t>
-            </a:fld>
-            <a:endParaRPr lang="en-US"/>
-          </a:p>
-        </p:txBody>
-      </p:sp>
     </p:spTree>
     <p:extLst>
       <p:ext uri="{BB962C8B-B14F-4D97-AF65-F5344CB8AC3E}">
-        <p14:creationId xmlns:p14="http://schemas.microsoft.com/office/powerpoint/2010/main" val="1024086991"/>
+        <p14:creationId xmlns:p14="http://schemas.microsoft.com/office/powerpoint/2010/main" val="498838933"/>
       </p:ext>
     </p:extLst>
   </p:cSld>
@@ -509,10 +290,6 @@
           <a:bodyPr/>
           <a:lstStyle/>
           <a:p>
-            <a:r>
-              <a:rPr lang="en-US" dirty="0"/>
-              <a:t/>
-            </a:r>
             <a:endParaRPr lang="en-US" dirty="0"/>
           </a:p>
         </p:txBody>
@@ -597,10 +374,6 @@
           <a:bodyPr/>
           <a:lstStyle/>
           <a:p>
-            <a:r>
-              <a:rPr lang="en-US" dirty="0"/>
-              <a:t/>
-            </a:r>
             <a:endParaRPr lang="en-US" dirty="0"/>
           </a:p>
         </p:txBody>
@@ -685,10 +458,6 @@
           <a:bodyPr/>
           <a:lstStyle/>
           <a:p>
-            <a:r>
-              <a:rPr lang="en-US" dirty="0"/>
-              <a:t/>
-            </a:r>
             <a:endParaRPr lang="en-US" dirty="0"/>
           </a:p>
         </p:txBody>
@@ -773,10 +542,6 @@
           <a:bodyPr/>
           <a:lstStyle/>
           <a:p>
-            <a:r>
-              <a:rPr lang="en-US" dirty="0"/>
-              <a:t/>
-            </a:r>
             <a:endParaRPr lang="en-US" dirty="0"/>
           </a:p>
         </p:txBody>
@@ -861,10 +626,6 @@
           <a:bodyPr/>
           <a:lstStyle/>
           <a:p>
-            <a:r>
-              <a:rPr lang="en-US" dirty="0"/>
-              <a:t/>
-            </a:r>
             <a:endParaRPr lang="en-US" dirty="0"/>
           </a:p>
         </p:txBody>
@@ -949,10 +710,6 @@
           <a:bodyPr/>
           <a:lstStyle/>
           <a:p>
-            <a:r>
-              <a:rPr lang="en-US" dirty="0"/>
-              <a:t/>
-            </a:r>
             <a:endParaRPr lang="en-US" dirty="0"/>
           </a:p>
         </p:txBody>
@@ -1037,10 +794,6 @@
           <a:bodyPr/>
           <a:lstStyle/>
           <a:p>
-            <a:r>
-              <a:rPr lang="en-US" dirty="0"/>
-              <a:t/>
-            </a:r>
             <a:endParaRPr lang="en-US" dirty="0"/>
           </a:p>
         </p:txBody>
@@ -1125,10 +878,6 @@
           <a:bodyPr/>
           <a:lstStyle/>
           <a:p>
-            <a:r>
-              <a:rPr lang="en-US" dirty="0"/>
-              <a:t/>
-            </a:r>
             <a:endParaRPr lang="en-US" dirty="0"/>
           </a:p>
         </p:txBody>
@@ -1213,10 +962,6 @@
           <a:bodyPr/>
           <a:lstStyle/>
           <a:p>
-            <a:r>
-              <a:rPr lang="en-US" dirty="0"/>
-              <a:t/>
-            </a:r>
             <a:endParaRPr lang="en-US" dirty="0"/>
           </a:p>
         </p:txBody>
@@ -1301,10 +1046,6 @@
           <a:bodyPr/>
           <a:lstStyle/>
           <a:p>
-            <a:r>
-              <a:rPr lang="en-US" dirty="0"/>
-              <a:t/>
-            </a:r>
             <a:endParaRPr lang="en-US" dirty="0"/>
           </a:p>
         </p:txBody>
@@ -1378,6 +1119,11 @@
 <file path=ppt/slideMasters/slideMaster1.xml><?xml version="1.0" encoding="utf-8"?>
 <p:sldMaster xmlns:a="http://schemas.openxmlformats.org/drawingml/2006/main" xmlns:r="http://schemas.openxmlformats.org/officeDocument/2006/relationships" xmlns:p="http://schemas.openxmlformats.org/presentationml/2006/main">
   <p:cSld>
+    <p:bg>
+      <p:bgRef idx="1001">
+        <a:schemeClr val="bg1"/>
+      </p:bgRef>
+    </p:bg>
     <p:spTree>
       <p:nvGrpSpPr>
         <p:cNvPr id="1" name=""/>
@@ -1660,6 +1406,7 @@
         <a:solidFill>
           <a:srgbClr val="1E2761"/>
         </a:solidFill>
+        <a:effectLst/>
       </p:bgPr>
     </p:bg>
     <p:spTree>
@@ -1697,7 +1444,7 @@
           <a:bodyPr wrap="square" lIns="0" tIns="0" rIns="0" bIns="0" rtlCol="0" anchor="ctr"/>
           <a:lstStyle/>
           <a:p>
-            <a:pPr indent="0" marL="0">
+            <a:pPr marL="0" indent="0">
               <a:buNone/>
             </a:pPr>
             <a:r>
@@ -1714,7 +1461,7 @@
             <a:endParaRPr lang="en-US" sz="4000" dirty="0"/>
           </a:p>
           <a:p>
-            <a:pPr indent="0" marL="0">
+            <a:pPr marL="0" indent="0">
               <a:buNone/>
             </a:pPr>
             <a:r>
@@ -1753,7 +1500,7 @@
           <a:bodyPr wrap="square" lIns="0" tIns="0" rIns="0" bIns="0" rtlCol="0" anchor="ctr"/>
           <a:lstStyle/>
           <a:p>
-            <a:pPr indent="0" marL="0">
+            <a:pPr marL="0" indent="0">
               <a:buNone/>
             </a:pPr>
             <a:r>
@@ -1793,6 +1540,13 @@
             <a:prstDash val="solid"/>
           </a:ln>
         </p:spPr>
+        <p:txBody>
+          <a:bodyPr/>
+          <a:lstStyle/>
+          <a:p>
+            <a:endParaRPr lang="pl-PL"/>
+          </a:p>
+        </p:txBody>
       </p:sp>
       <p:sp>
         <p:nvSpPr>
@@ -1813,6 +1567,13 @@
           </a:solidFill>
           <a:ln/>
         </p:spPr>
+        <p:txBody>
+          <a:bodyPr/>
+          <a:lstStyle/>
+          <a:p>
+            <a:endParaRPr lang="pl-PL"/>
+          </a:p>
+        </p:txBody>
       </p:sp>
       <p:sp>
         <p:nvSpPr>
@@ -1836,6 +1597,13 @@
             <a:prstDash val="solid"/>
           </a:ln>
         </p:spPr>
+        <p:txBody>
+          <a:bodyPr/>
+          <a:lstStyle/>
+          <a:p>
+            <a:endParaRPr lang="pl-PL"/>
+          </a:p>
+        </p:txBody>
       </p:sp>
       <p:sp>
         <p:nvSpPr>
@@ -1856,6 +1624,13 @@
           </a:solidFill>
           <a:ln/>
         </p:spPr>
+        <p:txBody>
+          <a:bodyPr/>
+          <a:lstStyle/>
+          <a:p>
+            <a:endParaRPr lang="pl-PL"/>
+          </a:p>
+        </p:txBody>
       </p:sp>
       <p:sp>
         <p:nvSpPr>
@@ -1876,6 +1651,13 @@
           </a:solidFill>
           <a:ln/>
         </p:spPr>
+        <p:txBody>
+          <a:bodyPr/>
+          <a:lstStyle/>
+          <a:p>
+            <a:endParaRPr lang="pl-PL"/>
+          </a:p>
+        </p:txBody>
       </p:sp>
       <p:sp>
         <p:nvSpPr>
@@ -1898,7 +1680,7 @@
           <a:bodyPr wrap="square" lIns="0" tIns="0" rIns="0" bIns="0" rtlCol="0" anchor="ctr"/>
           <a:lstStyle/>
           <a:p>
-            <a:pPr indent="0" marL="0">
+            <a:pPr marL="0" indent="0">
               <a:buNone/>
             </a:pPr>
             <a:r>
@@ -1937,7 +1719,7 @@
           <a:bodyPr wrap="square" lIns="0" tIns="0" rIns="0" bIns="0" rtlCol="0" anchor="ctr"/>
           <a:lstStyle/>
           <a:p>
-            <a:pPr indent="0" marL="0">
+            <a:pPr marL="0" indent="0">
               <a:buNone/>
             </a:pPr>
             <a:r>
@@ -1952,6 +1734,60 @@
               <a:t>czerwiec 2026</a:t>
             </a:r>
             <a:endParaRPr lang="en-US" sz="1400" dirty="0"/>
+          </a:p>
+        </p:txBody>
+      </p:sp>
+      <p:sp>
+        <p:nvSpPr>
+          <p:cNvPr id="11" name="pole tekstowe 10">
+            <a:extLst>
+              <a:ext uri="{FF2B5EF4-FFF2-40B4-BE49-F238E27FC236}">
+                <a16:creationId xmlns:a16="http://schemas.microsoft.com/office/drawing/2014/main" id="{95A23EA1-D22C-C261-B3A6-B06C2AA42CA2}"/>
+              </a:ext>
+            </a:extLst>
+          </p:cNvPr>
+          <p:cNvSpPr txBox="1"/>
+          <p:nvPr/>
+        </p:nvSpPr>
+        <p:spPr>
+          <a:xfrm>
+            <a:off x="7719892" y="4602998"/>
+            <a:ext cx="1424108" cy="523220"/>
+          </a:xfrm>
+          <a:prstGeom prst="rect">
+            <a:avLst/>
+          </a:prstGeom>
+          <a:noFill/>
+        </p:spPr>
+        <p:txBody>
+          <a:bodyPr wrap="none" rtlCol="0">
+            <a:spAutoFit/>
+          </a:bodyPr>
+          <a:lstStyle/>
+          <a:p>
+            <a:r>
+              <a:rPr lang="pl-PL" sz="1400" dirty="0">
+                <a:solidFill>
+                  <a:schemeClr val="bg1"/>
+                </a:solidFill>
+              </a:rPr>
+              <a:t>Cezary Polkowski</a:t>
+            </a:r>
+            <a:br>
+              <a:rPr lang="pl-PL" sz="1400" dirty="0">
+                <a:solidFill>
+                  <a:schemeClr val="bg1"/>
+                </a:solidFill>
+              </a:rPr>
+            </a:br>
+            <a:r>
+              <a:rPr lang="pl-PL" sz="1400" dirty="0">
+                <a:solidFill>
+                  <a:schemeClr val="bg1"/>
+                </a:solidFill>
+              </a:rPr>
+              <a:t>Mateusz Stasiak</a:t>
+            </a:r>
           </a:p>
         </p:txBody>
       </p:sp>
@@ -1971,6 +1807,7 @@
         <a:solidFill>
           <a:srgbClr val="1E2761"/>
         </a:solidFill>
+        <a:effectLst/>
       </p:bgPr>
     </p:bg>
     <p:spTree>
@@ -2008,7 +1845,7 @@
           <a:bodyPr wrap="square" lIns="0" tIns="0" rIns="0" bIns="0" rtlCol="0" anchor="ctr"/>
           <a:lstStyle/>
           <a:p>
-            <a:pPr indent="0" marL="0">
+            <a:pPr marL="0" indent="0">
               <a:buNone/>
             </a:pPr>
             <a:r>
@@ -2028,211 +1865,7 @@
       </p:sp>
       <p:pic>
         <p:nvPicPr>
-          <p:cNvPr id="3" name="Image 0" descr="preencoded.png">    </p:cNvPr>
-          <p:cNvPicPr>
-            <a:picLocks noChangeAspect="1"/>
-          </p:cNvPicPr>
-          <p:nvPr/>
-        </p:nvPicPr>
-        <p:blipFill>
-          <a:blip r:embed="rId1"/>
-          <a:stretch>
-            <a:fillRect/>
-          </a:stretch>
-        </p:blipFill>
-        <p:spPr>
-          <a:xfrm>
-            <a:off x="685800" y="1280160"/>
-            <a:ext cx="365760" cy="365760"/>
-          </a:xfrm>
-          <a:prstGeom prst="rect">
-            <a:avLst/>
-          </a:prstGeom>
-        </p:spPr>
-      </p:pic>
-      <p:sp>
-        <p:nvSpPr>
-          <p:cNvPr id="4" name="Text 1"/>
-          <p:cNvSpPr/>
-          <p:nvPr/>
-        </p:nvSpPr>
-        <p:spPr>
-          <a:xfrm>
-            <a:off x="1234440" y="1234440"/>
-            <a:ext cx="7315200" cy="347472"/>
-          </a:xfrm>
-          <a:prstGeom prst="rect">
-            <a:avLst/>
-          </a:prstGeom>
-          <a:noFill/>
-          <a:ln/>
-        </p:spPr>
-        <p:txBody>
-          <a:bodyPr wrap="square" lIns="0" tIns="0" rIns="0" bIns="0" rtlCol="0" anchor="ctr"/>
-          <a:lstStyle/>
-          <a:p>
-            <a:pPr indent="0" marL="0">
-              <a:buNone/>
-            </a:pPr>
-            <a:r>
-              <a:rPr lang="en-US" sz="1650" b="1" dirty="0">
-                <a:solidFill>
-                  <a:srgbClr val="FFFFFF"/>
-                </a:solidFill>
-                <a:latin typeface="Calibri" pitchFamily="34" charset="0"/>
-                <a:ea typeface="Calibri" pitchFamily="34" charset="-122"/>
-                <a:cs typeface="Calibri" pitchFamily="34" charset="-120"/>
-              </a:rPr>
-              <a:t>Łańcuch Markowa jako model rynku</a:t>
-            </a:r>
-            <a:endParaRPr lang="en-US" sz="1650" dirty="0"/>
-          </a:p>
-        </p:txBody>
-      </p:sp>
-      <p:sp>
-        <p:nvSpPr>
-          <p:cNvPr id="5" name="Text 2"/>
-          <p:cNvSpPr/>
-          <p:nvPr/>
-        </p:nvSpPr>
-        <p:spPr>
-          <a:xfrm>
-            <a:off x="1234440" y="1581912"/>
-            <a:ext cx="7315200" cy="384048"/>
-          </a:xfrm>
-          <a:prstGeom prst="rect">
-            <a:avLst/>
-          </a:prstGeom>
-          <a:noFill/>
-          <a:ln/>
-        </p:spPr>
-        <p:txBody>
-          <a:bodyPr wrap="square" lIns="0" tIns="0" rIns="0" bIns="0" rtlCol="0" anchor="ctr"/>
-          <a:lstStyle/>
-          <a:p>
-            <a:pPr indent="0" marL="0">
-              <a:buNone/>
-            </a:pPr>
-            <a:r>
-              <a:rPr lang="en-US" sz="1250" dirty="0">
-                <a:solidFill>
-                  <a:srgbClr val="CADCFC"/>
-                </a:solidFill>
-                <a:latin typeface="Calibri" pitchFamily="34" charset="0"/>
-                <a:ea typeface="Calibri" pitchFamily="34" charset="-122"/>
-                <a:cs typeface="Calibri" pitchFamily="34" charset="-120"/>
-              </a:rPr>
-              <a:t>Trwałe reżimy (hossa / stagnacja / bessa) sterują rozkładem zwrotów — 1000 scenariuszy Monte Carlo.</a:t>
-            </a:r>
-            <a:endParaRPr lang="en-US" sz="1250" dirty="0"/>
-          </a:p>
-        </p:txBody>
-      </p:sp>
-      <p:pic>
-        <p:nvPicPr>
-          <p:cNvPr id="6" name="Image 1" descr="preencoded.png">    </p:cNvPr>
-          <p:cNvPicPr>
-            <a:picLocks noChangeAspect="1"/>
-          </p:cNvPicPr>
-          <p:nvPr/>
-        </p:nvPicPr>
-        <p:blipFill>
-          <a:blip r:embed="rId2"/>
-          <a:stretch>
-            <a:fillRect/>
-          </a:stretch>
-        </p:blipFill>
-        <p:spPr>
-          <a:xfrm>
-            <a:off x="685800" y="2167128"/>
-            <a:ext cx="365760" cy="365760"/>
-          </a:xfrm>
-          <a:prstGeom prst="rect">
-            <a:avLst/>
-          </a:prstGeom>
-        </p:spPr>
-      </p:pic>
-      <p:sp>
-        <p:nvSpPr>
-          <p:cNvPr id="7" name="Text 3"/>
-          <p:cNvSpPr/>
-          <p:nvPr/>
-        </p:nvSpPr>
-        <p:spPr>
-          <a:xfrm>
-            <a:off x="1234440" y="2121408"/>
-            <a:ext cx="7315200" cy="347472"/>
-          </a:xfrm>
-          <a:prstGeom prst="rect">
-            <a:avLst/>
-          </a:prstGeom>
-          <a:noFill/>
-          <a:ln/>
-        </p:spPr>
-        <p:txBody>
-          <a:bodyPr wrap="square" lIns="0" tIns="0" rIns="0" bIns="0" rtlCol="0" anchor="ctr"/>
-          <a:lstStyle/>
-          <a:p>
-            <a:pPr indent="0" marL="0">
-              <a:buNone/>
-            </a:pPr>
-            <a:r>
-              <a:rPr lang="en-US" sz="1650" b="1" dirty="0">
-                <a:solidFill>
-                  <a:srgbClr val="FFFFFF"/>
-                </a:solidFill>
-                <a:latin typeface="Calibri" pitchFamily="34" charset="0"/>
-                <a:ea typeface="Calibri" pitchFamily="34" charset="-122"/>
-                <a:cs typeface="Calibri" pitchFamily="34" charset="-120"/>
-              </a:rPr>
-              <a:t>CVaR zamiast wariancji</a:t>
-            </a:r>
-            <a:endParaRPr lang="en-US" sz="1650" dirty="0"/>
-          </a:p>
-        </p:txBody>
-      </p:sp>
-      <p:sp>
-        <p:nvSpPr>
-          <p:cNvPr id="8" name="Text 4"/>
-          <p:cNvSpPr/>
-          <p:nvPr/>
-        </p:nvSpPr>
-        <p:spPr>
-          <a:xfrm>
-            <a:off x="1234440" y="2468880"/>
-            <a:ext cx="7315200" cy="384048"/>
-          </a:xfrm>
-          <a:prstGeom prst="rect">
-            <a:avLst/>
-          </a:prstGeom>
-          <a:noFill/>
-          <a:ln/>
-        </p:spPr>
-        <p:txBody>
-          <a:bodyPr wrap="square" lIns="0" tIns="0" rIns="0" bIns="0" rtlCol="0" anchor="ctr"/>
-          <a:lstStyle/>
-          <a:p>
-            <a:pPr indent="0" marL="0">
-              <a:buNone/>
-            </a:pPr>
-            <a:r>
-              <a:rPr lang="en-US" sz="1250" dirty="0">
-                <a:solidFill>
-                  <a:srgbClr val="CADCFC"/>
-                </a:solidFill>
-                <a:latin typeface="Calibri" pitchFamily="34" charset="0"/>
-                <a:ea typeface="Calibri" pitchFamily="34" charset="-122"/>
-                <a:cs typeface="Calibri" pitchFamily="34" charset="-120"/>
-              </a:rPr>
-              <a:t>Miara ryzyka, która uśrednia najgorsze 5% scenariuszy zamiast karać również zyski.</a:t>
-            </a:r>
-            <a:endParaRPr lang="en-US" sz="1250" dirty="0"/>
-          </a:p>
-        </p:txBody>
-      </p:sp>
-      <p:pic>
-        <p:nvPicPr>
-          <p:cNvPr id="9" name="Image 2" descr="preencoded.png">    </p:cNvPr>
+          <p:cNvPr id="3" name="Image 0" descr="preencoded.png"/>
           <p:cNvPicPr>
             <a:picLocks noChangeAspect="1"/>
           </p:cNvPicPr>
@@ -2246,7 +1879,7 @@
         </p:blipFill>
         <p:spPr>
           <a:xfrm>
-            <a:off x="685800" y="3054096"/>
+            <a:off x="685800" y="1280160"/>
             <a:ext cx="365760" cy="365760"/>
           </a:xfrm>
           <a:prstGeom prst="rect">
@@ -2256,13 +1889,13 @@
       </p:pic>
       <p:sp>
         <p:nvSpPr>
-          <p:cNvPr id="10" name="Text 5"/>
-          <p:cNvSpPr/>
-          <p:nvPr/>
-        </p:nvSpPr>
-        <p:spPr>
-          <a:xfrm>
-            <a:off x="1234440" y="3008376"/>
+          <p:cNvPr id="4" name="Text 1"/>
+          <p:cNvSpPr/>
+          <p:nvPr/>
+        </p:nvSpPr>
+        <p:spPr>
+          <a:xfrm>
+            <a:off x="1234440" y="1234440"/>
             <a:ext cx="7315200" cy="347472"/>
           </a:xfrm>
           <a:prstGeom prst="rect">
@@ -2275,7 +1908,7 @@
           <a:bodyPr wrap="square" lIns="0" tIns="0" rIns="0" bIns="0" rtlCol="0" anchor="ctr"/>
           <a:lstStyle/>
           <a:p>
-            <a:pPr indent="0" marL="0">
+            <a:pPr marL="0" indent="0">
               <a:buNone/>
             </a:pPr>
             <a:r>
@@ -2287,7 +1920,7 @@
                 <a:ea typeface="Calibri" pitchFamily="34" charset="-122"/>
                 <a:cs typeface="Calibri" pitchFamily="34" charset="-120"/>
               </a:rPr>
-              <a:t>Optymalizacja jako program liniowy</a:t>
+              <a:t>Łańcuch Markowa jako model rynku</a:t>
             </a:r>
             <a:endParaRPr lang="en-US" sz="1650" dirty="0"/>
           </a:p>
@@ -2295,13 +1928,13 @@
       </p:sp>
       <p:sp>
         <p:nvSpPr>
-          <p:cNvPr id="11" name="Text 6"/>
-          <p:cNvSpPr/>
-          <p:nvPr/>
-        </p:nvSpPr>
-        <p:spPr>
-          <a:xfrm>
-            <a:off x="1234440" y="3355848"/>
+          <p:cNvPr id="5" name="Text 2"/>
+          <p:cNvSpPr/>
+          <p:nvPr/>
+        </p:nvSpPr>
+        <p:spPr>
+          <a:xfrm>
+            <a:off x="1234440" y="1581912"/>
             <a:ext cx="7315200" cy="384048"/>
           </a:xfrm>
           <a:prstGeom prst="rect">
@@ -2314,7 +1947,7 @@
           <a:bodyPr wrap="square" lIns="0" tIns="0" rIns="0" bIns="0" rtlCol="0" anchor="ctr"/>
           <a:lstStyle/>
           <a:p>
-            <a:pPr indent="0" marL="0">
+            <a:pPr marL="0" indent="0">
               <a:buNone/>
             </a:pPr>
             <a:r>
@@ -2326,7 +1959,7 @@
                 <a:ea typeface="Calibri" pitchFamily="34" charset="-122"/>
                 <a:cs typeface="Calibri" pitchFamily="34" charset="-120"/>
               </a:rPr>
-              <a:t>Formuła Rockafellara–Uryaseva + linearyzacja (·)⁺ — przy okazji za darmo dostajemy VaR = β*.</a:t>
+              <a:t>Trwałe reżimy (hossa / stagnacja / bessa) sterują rozkładem zwrotów — 1000 scenariuszy Monte Carlo.</a:t>
             </a:r>
             <a:endParaRPr lang="en-US" sz="1250" dirty="0"/>
           </a:p>
@@ -2334,21 +1967,21 @@
       </p:sp>
       <p:pic>
         <p:nvPicPr>
-          <p:cNvPr id="12" name="Image 3" descr="preencoded.png">    </p:cNvPr>
+          <p:cNvPr id="6" name="Image 1" descr="preencoded.png"/>
           <p:cNvPicPr>
             <a:picLocks noChangeAspect="1"/>
           </p:cNvPicPr>
           <p:nvPr/>
         </p:nvPicPr>
         <p:blipFill>
-          <a:blip r:embed="rId4"/>
+          <a:blip r:embed="rId3"/>
           <a:stretch>
             <a:fillRect/>
           </a:stretch>
         </p:blipFill>
         <p:spPr>
           <a:xfrm>
-            <a:off x="685800" y="3941064"/>
+            <a:off x="685800" y="2167128"/>
             <a:ext cx="365760" cy="365760"/>
           </a:xfrm>
           <a:prstGeom prst="rect">
@@ -2358,13 +1991,13 @@
       </p:pic>
       <p:sp>
         <p:nvSpPr>
-          <p:cNvPr id="13" name="Text 7"/>
-          <p:cNvSpPr/>
-          <p:nvPr/>
-        </p:nvSpPr>
-        <p:spPr>
-          <a:xfrm>
-            <a:off x="1234440" y="3895344"/>
+          <p:cNvPr id="7" name="Text 3"/>
+          <p:cNvSpPr/>
+          <p:nvPr/>
+        </p:nvSpPr>
+        <p:spPr>
+          <a:xfrm>
+            <a:off x="1234440" y="2121408"/>
             <a:ext cx="7315200" cy="347472"/>
           </a:xfrm>
           <a:prstGeom prst="rect">
@@ -2377,7 +2010,7 @@
           <a:bodyPr wrap="square" lIns="0" tIns="0" rIns="0" bIns="0" rtlCol="0" anchor="ctr"/>
           <a:lstStyle/>
           <a:p>
-            <a:pPr indent="0" marL="0">
+            <a:pPr marL="0" indent="0">
               <a:buNone/>
             </a:pPr>
             <a:r>
@@ -2389,6 +2022,210 @@
                 <a:ea typeface="Calibri" pitchFamily="34" charset="-122"/>
                 <a:cs typeface="Calibri" pitchFamily="34" charset="-120"/>
               </a:rPr>
+              <a:t>CVaR zamiast wariancji</a:t>
+            </a:r>
+            <a:endParaRPr lang="en-US" sz="1650" dirty="0"/>
+          </a:p>
+        </p:txBody>
+      </p:sp>
+      <p:sp>
+        <p:nvSpPr>
+          <p:cNvPr id="8" name="Text 4"/>
+          <p:cNvSpPr/>
+          <p:nvPr/>
+        </p:nvSpPr>
+        <p:spPr>
+          <a:xfrm>
+            <a:off x="1234440" y="2468880"/>
+            <a:ext cx="7315200" cy="384048"/>
+          </a:xfrm>
+          <a:prstGeom prst="rect">
+            <a:avLst/>
+          </a:prstGeom>
+          <a:noFill/>
+          <a:ln/>
+        </p:spPr>
+        <p:txBody>
+          <a:bodyPr wrap="square" lIns="0" tIns="0" rIns="0" bIns="0" rtlCol="0" anchor="ctr"/>
+          <a:lstStyle/>
+          <a:p>
+            <a:pPr marL="0" indent="0">
+              <a:buNone/>
+            </a:pPr>
+            <a:r>
+              <a:rPr lang="en-US" sz="1250" dirty="0">
+                <a:solidFill>
+                  <a:srgbClr val="CADCFC"/>
+                </a:solidFill>
+                <a:latin typeface="Calibri" pitchFamily="34" charset="0"/>
+                <a:ea typeface="Calibri" pitchFamily="34" charset="-122"/>
+                <a:cs typeface="Calibri" pitchFamily="34" charset="-120"/>
+              </a:rPr>
+              <a:t>Miara ryzyka, która uśrednia najgorsze 5% scenariuszy zamiast karać również zyski.</a:t>
+            </a:r>
+            <a:endParaRPr lang="en-US" sz="1250" dirty="0"/>
+          </a:p>
+        </p:txBody>
+      </p:sp>
+      <p:pic>
+        <p:nvPicPr>
+          <p:cNvPr id="9" name="Image 2" descr="preencoded.png"/>
+          <p:cNvPicPr>
+            <a:picLocks noChangeAspect="1"/>
+          </p:cNvPicPr>
+          <p:nvPr/>
+        </p:nvPicPr>
+        <p:blipFill>
+          <a:blip r:embed="rId3"/>
+          <a:stretch>
+            <a:fillRect/>
+          </a:stretch>
+        </p:blipFill>
+        <p:spPr>
+          <a:xfrm>
+            <a:off x="685800" y="3054096"/>
+            <a:ext cx="365760" cy="365760"/>
+          </a:xfrm>
+          <a:prstGeom prst="rect">
+            <a:avLst/>
+          </a:prstGeom>
+        </p:spPr>
+      </p:pic>
+      <p:sp>
+        <p:nvSpPr>
+          <p:cNvPr id="10" name="Text 5"/>
+          <p:cNvSpPr/>
+          <p:nvPr/>
+        </p:nvSpPr>
+        <p:spPr>
+          <a:xfrm>
+            <a:off x="1234440" y="3008376"/>
+            <a:ext cx="7315200" cy="347472"/>
+          </a:xfrm>
+          <a:prstGeom prst="rect">
+            <a:avLst/>
+          </a:prstGeom>
+          <a:noFill/>
+          <a:ln/>
+        </p:spPr>
+        <p:txBody>
+          <a:bodyPr wrap="square" lIns="0" tIns="0" rIns="0" bIns="0" rtlCol="0" anchor="ctr"/>
+          <a:lstStyle/>
+          <a:p>
+            <a:pPr marL="0" indent="0">
+              <a:buNone/>
+            </a:pPr>
+            <a:r>
+              <a:rPr lang="en-US" sz="1650" b="1" dirty="0">
+                <a:solidFill>
+                  <a:srgbClr val="FFFFFF"/>
+                </a:solidFill>
+                <a:latin typeface="Calibri" pitchFamily="34" charset="0"/>
+                <a:ea typeface="Calibri" pitchFamily="34" charset="-122"/>
+                <a:cs typeface="Calibri" pitchFamily="34" charset="-120"/>
+              </a:rPr>
+              <a:t>Optymalizacja jako program liniowy</a:t>
+            </a:r>
+            <a:endParaRPr lang="en-US" sz="1650" dirty="0"/>
+          </a:p>
+        </p:txBody>
+      </p:sp>
+      <p:sp>
+        <p:nvSpPr>
+          <p:cNvPr id="11" name="Text 6"/>
+          <p:cNvSpPr/>
+          <p:nvPr/>
+        </p:nvSpPr>
+        <p:spPr>
+          <a:xfrm>
+            <a:off x="1234440" y="3355848"/>
+            <a:ext cx="7315200" cy="384048"/>
+          </a:xfrm>
+          <a:prstGeom prst="rect">
+            <a:avLst/>
+          </a:prstGeom>
+          <a:noFill/>
+          <a:ln/>
+        </p:spPr>
+        <p:txBody>
+          <a:bodyPr wrap="square" lIns="0" tIns="0" rIns="0" bIns="0" rtlCol="0" anchor="ctr"/>
+          <a:lstStyle/>
+          <a:p>
+            <a:pPr marL="0" indent="0">
+              <a:buNone/>
+            </a:pPr>
+            <a:r>
+              <a:rPr lang="en-US" sz="1250" dirty="0">
+                <a:solidFill>
+                  <a:srgbClr val="CADCFC"/>
+                </a:solidFill>
+                <a:latin typeface="Calibri" pitchFamily="34" charset="0"/>
+                <a:ea typeface="Calibri" pitchFamily="34" charset="-122"/>
+                <a:cs typeface="Calibri" pitchFamily="34" charset="-120"/>
+              </a:rPr>
+              <a:t>Formuła Rockafellara–Uryaseva + linearyzacja (·)⁺ — przy okazji za darmo dostajemy VaR = β*.</a:t>
+            </a:r>
+            <a:endParaRPr lang="en-US" sz="1250" dirty="0"/>
+          </a:p>
+        </p:txBody>
+      </p:sp>
+      <p:pic>
+        <p:nvPicPr>
+          <p:cNvPr id="12" name="Image 3" descr="preencoded.png"/>
+          <p:cNvPicPr>
+            <a:picLocks noChangeAspect="1"/>
+          </p:cNvPicPr>
+          <p:nvPr/>
+        </p:nvPicPr>
+        <p:blipFill>
+          <a:blip r:embed="rId3"/>
+          <a:stretch>
+            <a:fillRect/>
+          </a:stretch>
+        </p:blipFill>
+        <p:spPr>
+          <a:xfrm>
+            <a:off x="685800" y="3941064"/>
+            <a:ext cx="365760" cy="365760"/>
+          </a:xfrm>
+          <a:prstGeom prst="rect">
+            <a:avLst/>
+          </a:prstGeom>
+        </p:spPr>
+      </p:pic>
+      <p:sp>
+        <p:nvSpPr>
+          <p:cNvPr id="13" name="Text 7"/>
+          <p:cNvSpPr/>
+          <p:nvPr/>
+        </p:nvSpPr>
+        <p:spPr>
+          <a:xfrm>
+            <a:off x="1234440" y="3895344"/>
+            <a:ext cx="7315200" cy="347472"/>
+          </a:xfrm>
+          <a:prstGeom prst="rect">
+            <a:avLst/>
+          </a:prstGeom>
+          <a:noFill/>
+          <a:ln/>
+        </p:spPr>
+        <p:txBody>
+          <a:bodyPr wrap="square" lIns="0" tIns="0" rIns="0" bIns="0" rtlCol="0" anchor="ctr"/>
+          <a:lstStyle/>
+          <a:p>
+            <a:pPr marL="0" indent="0">
+              <a:buNone/>
+            </a:pPr>
+            <a:r>
+              <a:rPr lang="en-US" sz="1650" b="1" dirty="0">
+                <a:solidFill>
+                  <a:srgbClr val="FFFFFF"/>
+                </a:solidFill>
+                <a:latin typeface="Calibri" pitchFamily="34" charset="0"/>
+                <a:ea typeface="Calibri" pitchFamily="34" charset="-122"/>
+                <a:cs typeface="Calibri" pitchFamily="34" charset="-120"/>
+              </a:rPr>
               <a:t>Pełna granica efektywna</a:t>
             </a:r>
             <a:endParaRPr lang="en-US" sz="1650" dirty="0"/>
@@ -2416,7 +2253,7 @@
           <a:bodyPr wrap="square" lIns="0" tIns="0" rIns="0" bIns="0" rtlCol="0" anchor="ctr"/>
           <a:lstStyle/>
           <a:p>
-            <a:pPr indent="0" marL="0">
+            <a:pPr marL="0" indent="0">
               <a:buNone/>
             </a:pPr>
             <a:r>
@@ -2456,6 +2293,13 @@
             <a:prstDash val="solid"/>
           </a:ln>
         </p:spPr>
+        <p:txBody>
+          <a:bodyPr/>
+          <a:lstStyle/>
+          <a:p>
+            <a:endParaRPr lang="pl-PL"/>
+          </a:p>
+        </p:txBody>
       </p:sp>
       <p:sp>
         <p:nvSpPr>
@@ -2476,6 +2320,13 @@
           </a:solidFill>
           <a:ln/>
         </p:spPr>
+        <p:txBody>
+          <a:bodyPr/>
+          <a:lstStyle/>
+          <a:p>
+            <a:endParaRPr lang="pl-PL"/>
+          </a:p>
+        </p:txBody>
       </p:sp>
       <p:sp>
         <p:nvSpPr>
@@ -2499,6 +2350,13 @@
             <a:prstDash val="solid"/>
           </a:ln>
         </p:spPr>
+        <p:txBody>
+          <a:bodyPr/>
+          <a:lstStyle/>
+          <a:p>
+            <a:endParaRPr lang="pl-PL"/>
+          </a:p>
+        </p:txBody>
       </p:sp>
       <p:sp>
         <p:nvSpPr>
@@ -2519,6 +2377,13 @@
           </a:solidFill>
           <a:ln/>
         </p:spPr>
+        <p:txBody>
+          <a:bodyPr/>
+          <a:lstStyle/>
+          <a:p>
+            <a:endParaRPr lang="pl-PL"/>
+          </a:p>
+        </p:txBody>
       </p:sp>
       <p:sp>
         <p:nvSpPr>
@@ -2539,6 +2404,13 @@
           </a:solidFill>
           <a:ln/>
         </p:spPr>
+        <p:txBody>
+          <a:bodyPr/>
+          <a:lstStyle/>
+          <a:p>
+            <a:endParaRPr lang="pl-PL"/>
+          </a:p>
+        </p:txBody>
       </p:sp>
       <p:sp>
         <p:nvSpPr>
@@ -2561,7 +2433,7 @@
           <a:bodyPr wrap="square" lIns="0" tIns="0" rIns="0" bIns="0" rtlCol="0" anchor="ctr"/>
           <a:lstStyle/>
           <a:p>
-            <a:pPr algn="r" indent="0" marL="0">
+            <a:pPr marL="0" indent="0" algn="r">
               <a:buNone/>
             </a:pPr>
             <a:r>
@@ -2595,6 +2467,7 @@
         <a:solidFill>
           <a:srgbClr val="FFFFFF"/>
         </a:solidFill>
+        <a:effectLst/>
       </p:bgPr>
     </p:bg>
     <p:spTree>
@@ -2632,7 +2505,7 @@
           <a:bodyPr wrap="square" lIns="0" tIns="0" rIns="0" bIns="0" rtlCol="0" anchor="ctr"/>
           <a:lstStyle/>
           <a:p>
-            <a:pPr indent="0" marL="0">
+            <a:pPr marL="0" indent="0">
               <a:buNone/>
             </a:pPr>
             <a:r>
@@ -2671,7 +2544,7 @@
           <a:bodyPr wrap="square" lIns="0" tIns="0" rIns="0" bIns="0" rtlCol="0" anchor="ctr"/>
           <a:lstStyle/>
           <a:p>
-            <a:pPr indent="0" marL="0">
+            <a:pPr marL="0" indent="0">
               <a:buNone/>
             </a:pPr>
             <a:r>
@@ -2685,9 +2558,6 @@
               </a:rPr>
               <a:t>Mamy </a:t>
             </a:r>
-            <a:pPr indent="0" marL="0">
-              <a:buNone/>
-            </a:pPr>
             <a:r>
               <a:rPr lang="en-US" sz="1600" b="1" dirty="0">
                 <a:solidFill>
@@ -2699,9 +2569,6 @@
               </a:rPr>
               <a:t>10 000 PLN</a:t>
             </a:r>
-            <a:pPr indent="0" marL="0">
-              <a:buNone/>
-            </a:pPr>
             <a:r>
               <a:rPr lang="en-US" sz="1600" dirty="0">
                 <a:solidFill>
@@ -2713,9 +2580,6 @@
               </a:rPr>
               <a:t> i możemy kupić akcje </a:t>
             </a:r>
-            <a:pPr indent="0" marL="0">
-              <a:buNone/>
-            </a:pPr>
             <a:r>
               <a:rPr lang="en-US" sz="1600" b="1" dirty="0">
                 <a:solidFill>
@@ -2727,9 +2591,6 @@
               </a:rPr>
               <a:t>5 spółek</a:t>
             </a:r>
-            <a:pPr indent="0" marL="0">
-              <a:buNone/>
-            </a:pPr>
             <a:r>
               <a:rPr lang="en-US" sz="1600" dirty="0">
                 <a:solidFill>
@@ -2830,7 +2691,7 @@
           <a:bodyPr wrap="square" lIns="0" tIns="0" rIns="0" bIns="0" rtlCol="0" anchor="ctr"/>
           <a:lstStyle/>
           <a:p>
-            <a:pPr indent="0" marL="0">
+            <a:pPr marL="0" indent="0">
               <a:buNone/>
             </a:pPr>
             <a:r>
@@ -2844,9 +2705,6 @@
               </a:rPr>
               <a:t>„Ryzyko” mierzymy nowoczesną miarą </a:t>
             </a:r>
-            <a:pPr indent="0" marL="0">
-              <a:buNone/>
-            </a:pPr>
             <a:r>
               <a:rPr lang="en-US" sz="1450" b="1" i="1" dirty="0">
                 <a:solidFill>
@@ -2858,9 +2716,6 @@
               </a:rPr>
               <a:t>CVaR</a:t>
             </a:r>
-            <a:pPr indent="0" marL="0">
-              <a:buNone/>
-            </a:pPr>
             <a:r>
               <a:rPr lang="en-US" sz="1450" i="1" dirty="0">
                 <a:solidFill>
@@ -2895,6 +2750,13 @@
           </a:solidFill>
           <a:ln/>
         </p:spPr>
+        <p:txBody>
+          <a:bodyPr/>
+          <a:lstStyle/>
+          <a:p>
+            <a:endParaRPr lang="pl-PL"/>
+          </a:p>
+        </p:txBody>
       </p:sp>
       <p:sp>
         <p:nvSpPr>
@@ -2915,6 +2777,13 @@
           </a:solidFill>
           <a:ln/>
         </p:spPr>
+        <p:txBody>
+          <a:bodyPr/>
+          <a:lstStyle/>
+          <a:p>
+            <a:endParaRPr lang="pl-PL"/>
+          </a:p>
+        </p:txBody>
       </p:sp>
       <p:sp>
         <p:nvSpPr>
@@ -2935,17 +2804,24 @@
           </a:solidFill>
           <a:ln/>
         </p:spPr>
+        <p:txBody>
+          <a:bodyPr/>
+          <a:lstStyle/>
+          <a:p>
+            <a:endParaRPr lang="pl-PL"/>
+          </a:p>
+        </p:txBody>
       </p:sp>
       <p:pic>
         <p:nvPicPr>
-          <p:cNvPr id="9" name="Image 0" descr="preencoded.png">    </p:cNvPr>
+          <p:cNvPr id="9" name="Image 0" descr="preencoded.png"/>
           <p:cNvPicPr>
             <a:picLocks noChangeAspect="1"/>
           </p:cNvPicPr>
           <p:nvPr/>
         </p:nvPicPr>
         <p:blipFill>
-          <a:blip r:embed="rId1"/>
+          <a:blip r:embed="rId3"/>
           <a:stretch>
             <a:fillRect/>
           </a:stretch>
@@ -2981,11 +2857,11 @@
           <a:bodyPr wrap="square" lIns="0" tIns="0" rIns="0" bIns="0" rtlCol="0" anchor="ctr"/>
           <a:lstStyle/>
           <a:p>
-            <a:pPr indent="0" marL="0">
+            <a:pPr marL="0" indent="0">
               <a:buNone/>
             </a:pPr>
             <a:r>
-              <a:rPr lang="en-US" sz="1100" b="1" spc="200" kern="0" dirty="0">
+              <a:rPr lang="en-US" sz="1100" b="1" kern="0" spc="200" dirty="0">
                 <a:solidFill>
                   <a:srgbClr val="2C7A4B"/>
                 </a:solidFill>
@@ -3020,7 +2896,7 @@
           <a:bodyPr wrap="square" lIns="0" tIns="0" rIns="0" bIns="0" rtlCol="0" anchor="ctr"/>
           <a:lstStyle/>
           <a:p>
-            <a:pPr indent="0" marL="0">
+            <a:pPr marL="0" indent="0">
               <a:buNone/>
             </a:pPr>
             <a:r>
@@ -3059,7 +2935,7 @@
           <a:bodyPr wrap="square" lIns="0" tIns="0" rIns="0" bIns="0" rtlCol="0" anchor="ctr"/>
           <a:lstStyle/>
           <a:p>
-            <a:pPr indent="0" marL="0">
+            <a:pPr marL="0" indent="0">
               <a:buNone/>
             </a:pPr>
             <a:r>
@@ -3096,6 +2972,13 @@
           </a:solidFill>
           <a:ln/>
         </p:spPr>
+        <p:txBody>
+          <a:bodyPr/>
+          <a:lstStyle/>
+          <a:p>
+            <a:endParaRPr lang="pl-PL"/>
+          </a:p>
+        </p:txBody>
       </p:sp>
       <p:sp>
         <p:nvSpPr>
@@ -3116,6 +2999,13 @@
           </a:solidFill>
           <a:ln/>
         </p:spPr>
+        <p:txBody>
+          <a:bodyPr/>
+          <a:lstStyle/>
+          <a:p>
+            <a:endParaRPr lang="pl-PL"/>
+          </a:p>
+        </p:txBody>
       </p:sp>
       <p:sp>
         <p:nvSpPr>
@@ -3136,17 +3026,24 @@
           </a:solidFill>
           <a:ln/>
         </p:spPr>
+        <p:txBody>
+          <a:bodyPr/>
+          <a:lstStyle/>
+          <a:p>
+            <a:endParaRPr lang="pl-PL"/>
+          </a:p>
+        </p:txBody>
       </p:sp>
       <p:pic>
         <p:nvPicPr>
-          <p:cNvPr id="16" name="Image 1" descr="preencoded.png">    </p:cNvPr>
+          <p:cNvPr id="16" name="Image 1" descr="preencoded.png"/>
           <p:cNvPicPr>
             <a:picLocks noChangeAspect="1"/>
           </p:cNvPicPr>
           <p:nvPr/>
         </p:nvPicPr>
         <p:blipFill>
-          <a:blip r:embed="rId2"/>
+          <a:blip r:embed="rId4"/>
           <a:stretch>
             <a:fillRect/>
           </a:stretch>
@@ -3182,11 +3079,11 @@
           <a:bodyPr wrap="square" lIns="0" tIns="0" rIns="0" bIns="0" rtlCol="0" anchor="ctr"/>
           <a:lstStyle/>
           <a:p>
-            <a:pPr indent="0" marL="0">
+            <a:pPr marL="0" indent="0">
               <a:buNone/>
             </a:pPr>
             <a:r>
-              <a:rPr lang="en-US" sz="1100" b="1" spc="200" kern="0" dirty="0">
+              <a:rPr lang="en-US" sz="1100" b="1" kern="0" spc="200" dirty="0">
                 <a:solidFill>
                   <a:srgbClr val="1E2761"/>
                 </a:solidFill>
@@ -3221,7 +3118,7 @@
           <a:bodyPr wrap="square" lIns="0" tIns="0" rIns="0" bIns="0" rtlCol="0" anchor="ctr"/>
           <a:lstStyle/>
           <a:p>
-            <a:pPr indent="0" marL="0">
+            <a:pPr marL="0" indent="0">
               <a:buNone/>
             </a:pPr>
             <a:r>
@@ -3260,7 +3157,7 @@
           <a:bodyPr wrap="square" lIns="0" tIns="0" rIns="0" bIns="0" rtlCol="0" anchor="ctr"/>
           <a:lstStyle/>
           <a:p>
-            <a:pPr indent="0" marL="0">
+            <a:pPr marL="0" indent="0">
               <a:buNone/>
             </a:pPr>
             <a:r>
@@ -3294,6 +3191,7 @@
         <a:solidFill>
           <a:srgbClr val="FFFFFF"/>
         </a:solidFill>
+        <a:effectLst/>
       </p:bgPr>
     </p:bg>
     <p:spTree>
@@ -3331,7 +3229,7 @@
           <a:bodyPr wrap="square" lIns="0" tIns="0" rIns="0" bIns="0" rtlCol="0" anchor="ctr"/>
           <a:lstStyle/>
           <a:p>
-            <a:pPr indent="0" marL="0">
+            <a:pPr marL="0" indent="0">
               <a:buNone/>
             </a:pPr>
             <a:r>
@@ -3368,6 +3266,13 @@
           </a:solidFill>
           <a:ln/>
         </p:spPr>
+        <p:txBody>
+          <a:bodyPr/>
+          <a:lstStyle/>
+          <a:p>
+            <a:endParaRPr lang="pl-PL"/>
+          </a:p>
+        </p:txBody>
       </p:sp>
       <p:sp>
         <p:nvSpPr>
@@ -3388,6 +3293,13 @@
           </a:solidFill>
           <a:ln/>
         </p:spPr>
+        <p:txBody>
+          <a:bodyPr/>
+          <a:lstStyle/>
+          <a:p>
+            <a:endParaRPr lang="pl-PL"/>
+          </a:p>
+        </p:txBody>
       </p:sp>
       <p:sp>
         <p:nvSpPr>
@@ -3408,390 +3320,17 @@
           </a:solidFill>
           <a:ln/>
         </p:spPr>
+        <p:txBody>
+          <a:bodyPr/>
+          <a:lstStyle/>
+          <a:p>
+            <a:endParaRPr lang="pl-PL"/>
+          </a:p>
+        </p:txBody>
       </p:sp>
       <p:pic>
         <p:nvPicPr>
-          <p:cNvPr id="6" name="Image 0" descr="preencoded.png">    </p:cNvPr>
-          <p:cNvPicPr>
-            <a:picLocks noChangeAspect="1"/>
-          </p:cNvPicPr>
-          <p:nvPr/>
-        </p:nvPicPr>
-        <p:blipFill>
-          <a:blip r:embed="rId1"/>
-          <a:stretch>
-            <a:fillRect/>
-          </a:stretch>
-        </p:blipFill>
-        <p:spPr>
-          <a:xfrm>
-            <a:off x="816559" y="1273759"/>
-            <a:ext cx="241402" cy="241402"/>
-          </a:xfrm>
-          <a:prstGeom prst="rect">
-            <a:avLst/>
-          </a:prstGeom>
-        </p:spPr>
-      </p:pic>
-      <p:sp>
-        <p:nvSpPr>
-          <p:cNvPr id="7" name="Text 4"/>
-          <p:cNvSpPr/>
-          <p:nvPr/>
-        </p:nvSpPr>
-        <p:spPr>
-          <a:xfrm>
-            <a:off x="1353312" y="1188720"/>
-            <a:ext cx="3017520" cy="384048"/>
-          </a:xfrm>
-          <a:prstGeom prst="rect">
-            <a:avLst/>
-          </a:prstGeom>
-          <a:noFill/>
-          <a:ln/>
-        </p:spPr>
-        <p:txBody>
-          <a:bodyPr wrap="square" lIns="0" tIns="0" rIns="0" bIns="0" rtlCol="0" anchor="ctr"/>
-          <a:lstStyle/>
-          <a:p>
-            <a:pPr indent="0" marL="0">
-              <a:buNone/>
-            </a:pPr>
-            <a:r>
-              <a:rPr lang="en-US" sz="1650" b="1" dirty="0">
-                <a:solidFill>
-                  <a:srgbClr val="23272F"/>
-                </a:solidFill>
-                <a:latin typeface="Calibri" pitchFamily="34" charset="0"/>
-                <a:ea typeface="Calibri" pitchFamily="34" charset="-122"/>
-                <a:cs typeface="Calibri" pitchFamily="34" charset="-120"/>
-              </a:rPr>
-              <a:t>Portfel  x</a:t>
-            </a:r>
-            <a:endParaRPr lang="en-US" sz="1650" dirty="0"/>
-          </a:p>
-        </p:txBody>
-      </p:sp>
-      <p:sp>
-        <p:nvSpPr>
-          <p:cNvPr id="8" name="Text 5"/>
-          <p:cNvSpPr/>
-          <p:nvPr/>
-        </p:nvSpPr>
-        <p:spPr>
-          <a:xfrm>
-            <a:off x="731520" y="1755648"/>
-            <a:ext cx="3611880" cy="868680"/>
-          </a:xfrm>
-          <a:prstGeom prst="rect">
-            <a:avLst/>
-          </a:prstGeom>
-          <a:noFill/>
-          <a:ln/>
-        </p:spPr>
-        <p:txBody>
-          <a:bodyPr wrap="square" lIns="0" tIns="0" rIns="0" bIns="0" rtlCol="0" anchor="ctr"/>
-          <a:lstStyle/>
-          <a:p>
-            <a:pPr indent="0" marL="0">
-              <a:buNone/>
-            </a:pPr>
-            <a:r>
-              <a:rPr lang="en-US" sz="1250" dirty="0">
-                <a:solidFill>
-                  <a:srgbClr val="23272F"/>
-                </a:solidFill>
-                <a:latin typeface="Calibri" pitchFamily="34" charset="0"/>
-                <a:ea typeface="Calibri" pitchFamily="34" charset="-122"/>
-                <a:cs typeface="Calibri" pitchFamily="34" charset="-120"/>
-              </a:rPr>
-              <a:t>Wektor x mówi, ile sztuk każdej akcji kupujemy. Wartość portfela: </a:t>
-            </a:r>
-            <a:pPr indent="0" marL="0">
-              <a:buNone/>
-            </a:pPr>
-            <a:r>
-              <a:rPr lang="en-US" sz="1250" b="1" dirty="0">
-                <a:solidFill>
-                  <a:srgbClr val="1E2761"/>
-                </a:solidFill>
-                <a:latin typeface="Calibri" pitchFamily="34" charset="0"/>
-                <a:ea typeface="Calibri" pitchFamily="34" charset="-122"/>
-                <a:cs typeface="Calibri" pitchFamily="34" charset="-120"/>
-              </a:rPr>
-              <a:t>Vₜ(x) = Σ xᵢ·Sᵢₜ</a:t>
-            </a:r>
-            <a:pPr indent="0" marL="0">
-              <a:buNone/>
-            </a:pPr>
-            <a:r>
-              <a:rPr lang="en-US" sz="1250" dirty="0">
-                <a:solidFill>
-                  <a:srgbClr val="23272F"/>
-                </a:solidFill>
-                <a:latin typeface="Calibri" pitchFamily="34" charset="0"/>
-                <a:ea typeface="Calibri" pitchFamily="34" charset="-122"/>
-                <a:cs typeface="Calibri" pitchFamily="34" charset="-120"/>
-              </a:rPr>
-              <a:t> (cena × ilość).</a:t>
-            </a:r>
-            <a:endParaRPr lang="en-US" sz="1250" dirty="0"/>
-          </a:p>
-        </p:txBody>
-      </p:sp>
-      <p:sp>
-        <p:nvSpPr>
-          <p:cNvPr id="9" name="Shape 6"/>
-          <p:cNvSpPr/>
-          <p:nvPr/>
-        </p:nvSpPr>
-        <p:spPr>
-          <a:xfrm>
-            <a:off x="4663440" y="914400"/>
-            <a:ext cx="4023360" cy="1783080"/>
-          </a:xfrm>
-          <a:prstGeom prst="rect">
-            <a:avLst/>
-          </a:prstGeom>
-          <a:solidFill>
-            <a:srgbClr val="EAF1FE"/>
-          </a:solidFill>
-          <a:ln/>
-        </p:spPr>
-      </p:sp>
-      <p:sp>
-        <p:nvSpPr>
-          <p:cNvPr id="10" name="Shape 7"/>
-          <p:cNvSpPr/>
-          <p:nvPr/>
-        </p:nvSpPr>
-        <p:spPr>
-          <a:xfrm>
-            <a:off x="4663440" y="914400"/>
-            <a:ext cx="64008" cy="1783080"/>
-          </a:xfrm>
-          <a:prstGeom prst="rect">
-            <a:avLst/>
-          </a:prstGeom>
-          <a:solidFill>
-            <a:srgbClr val="2C7A4B"/>
-          </a:solidFill>
-          <a:ln/>
-        </p:spPr>
-      </p:sp>
-      <p:sp>
-        <p:nvSpPr>
-          <p:cNvPr id="11" name="Shape 8"/>
-          <p:cNvSpPr/>
-          <p:nvPr/>
-        </p:nvSpPr>
-        <p:spPr>
-          <a:xfrm>
-            <a:off x="4892040" y="1143000"/>
-            <a:ext cx="502920" cy="502920"/>
-          </a:xfrm>
-          <a:prstGeom prst="ellipse">
-            <a:avLst/>
-          </a:prstGeom>
-          <a:solidFill>
-            <a:srgbClr val="2C7A4B"/>
-          </a:solidFill>
-          <a:ln/>
-        </p:spPr>
-      </p:sp>
-      <p:pic>
-        <p:nvPicPr>
-          <p:cNvPr id="12" name="Image 1" descr="preencoded.png">    </p:cNvPr>
-          <p:cNvPicPr>
-            <a:picLocks noChangeAspect="1"/>
-          </p:cNvPicPr>
-          <p:nvPr/>
-        </p:nvPicPr>
-        <p:blipFill>
-          <a:blip r:embed="rId2"/>
-          <a:stretch>
-            <a:fillRect/>
-          </a:stretch>
-        </p:blipFill>
-        <p:spPr>
-          <a:xfrm>
-            <a:off x="5022799" y="1273759"/>
-            <a:ext cx="241402" cy="241402"/>
-          </a:xfrm>
-          <a:prstGeom prst="rect">
-            <a:avLst/>
-          </a:prstGeom>
-        </p:spPr>
-      </p:pic>
-      <p:sp>
-        <p:nvSpPr>
-          <p:cNvPr id="13" name="Text 9"/>
-          <p:cNvSpPr/>
-          <p:nvPr/>
-        </p:nvSpPr>
-        <p:spPr>
-          <a:xfrm>
-            <a:off x="5559552" y="1188720"/>
-            <a:ext cx="3017520" cy="384048"/>
-          </a:xfrm>
-          <a:prstGeom prst="rect">
-            <a:avLst/>
-          </a:prstGeom>
-          <a:noFill/>
-          <a:ln/>
-        </p:spPr>
-        <p:txBody>
-          <a:bodyPr wrap="square" lIns="0" tIns="0" rIns="0" bIns="0" rtlCol="0" anchor="ctr"/>
-          <a:lstStyle/>
-          <a:p>
-            <a:pPr indent="0" marL="0">
-              <a:buNone/>
-            </a:pPr>
-            <a:r>
-              <a:rPr lang="en-US" sz="1650" b="1" dirty="0">
-                <a:solidFill>
-                  <a:srgbClr val="23272F"/>
-                </a:solidFill>
-                <a:latin typeface="Calibri" pitchFamily="34" charset="0"/>
-                <a:ea typeface="Calibri" pitchFamily="34" charset="-122"/>
-                <a:cs typeface="Calibri" pitchFamily="34" charset="-120"/>
-              </a:rPr>
-              <a:t>Stopa zwrotu  R</a:t>
-            </a:r>
-            <a:endParaRPr lang="en-US" sz="1650" dirty="0"/>
-          </a:p>
-        </p:txBody>
-      </p:sp>
-      <p:sp>
-        <p:nvSpPr>
-          <p:cNvPr id="14" name="Text 10"/>
-          <p:cNvSpPr/>
-          <p:nvPr/>
-        </p:nvSpPr>
-        <p:spPr>
-          <a:xfrm>
-            <a:off x="4937760" y="1755648"/>
-            <a:ext cx="3611880" cy="868680"/>
-          </a:xfrm>
-          <a:prstGeom prst="rect">
-            <a:avLst/>
-          </a:prstGeom>
-          <a:noFill/>
-          <a:ln/>
-        </p:spPr>
-        <p:txBody>
-          <a:bodyPr wrap="square" lIns="0" tIns="0" rIns="0" bIns="0" rtlCol="0" anchor="ctr"/>
-          <a:lstStyle/>
-          <a:p>
-            <a:pPr indent="0" marL="0">
-              <a:buNone/>
-            </a:pPr>
-            <a:r>
-              <a:rPr lang="en-US" sz="1250" dirty="0">
-                <a:solidFill>
-                  <a:srgbClr val="23272F"/>
-                </a:solidFill>
-                <a:latin typeface="Calibri" pitchFamily="34" charset="0"/>
-                <a:ea typeface="Calibri" pitchFamily="34" charset="-122"/>
-                <a:cs typeface="Calibri" pitchFamily="34" charset="-120"/>
-              </a:rPr>
-              <a:t>Procentowy zysk lub strata na koniec (chwila T): </a:t>
-            </a:r>
-            <a:pPr indent="0" marL="0">
-              <a:buNone/>
-            </a:pPr>
-            <a:r>
-              <a:rPr lang="en-US" sz="1250" b="1" dirty="0">
-                <a:solidFill>
-                  <a:srgbClr val="1E2761"/>
-                </a:solidFill>
-                <a:latin typeface="Calibri" pitchFamily="34" charset="0"/>
-                <a:ea typeface="Calibri" pitchFamily="34" charset="-122"/>
-                <a:cs typeface="Calibri" pitchFamily="34" charset="-120"/>
-              </a:rPr>
-              <a:t>R = (Vₜ − V₀) / V₀</a:t>
-            </a:r>
-            <a:pPr indent="0" marL="0">
-              <a:buNone/>
-            </a:pPr>
-            <a:r>
-              <a:rPr lang="en-US" sz="1250" dirty="0">
-                <a:solidFill>
-                  <a:srgbClr val="23272F"/>
-                </a:solidFill>
-                <a:latin typeface="Calibri" pitchFamily="34" charset="0"/>
-                <a:ea typeface="Calibri" pitchFamily="34" charset="-122"/>
-                <a:cs typeface="Calibri" pitchFamily="34" charset="-120"/>
-              </a:rPr>
-              <a:t>.  Żądamy, by jej wartość oczekiwana wynosiła rₑ.</a:t>
-            </a:r>
-            <a:endParaRPr lang="en-US" sz="1250" dirty="0"/>
-          </a:p>
-        </p:txBody>
-      </p:sp>
-      <p:sp>
-        <p:nvSpPr>
-          <p:cNvPr id="15" name="Shape 11"/>
-          <p:cNvSpPr/>
-          <p:nvPr/>
-        </p:nvSpPr>
-        <p:spPr>
-          <a:xfrm>
-            <a:off x="457200" y="2926080"/>
-            <a:ext cx="4023360" cy="1783080"/>
-          </a:xfrm>
-          <a:prstGeom prst="rect">
-            <a:avLst/>
-          </a:prstGeom>
-          <a:solidFill>
-            <a:srgbClr val="EAF1FE"/>
-          </a:solidFill>
-          <a:ln/>
-        </p:spPr>
-      </p:sp>
-      <p:sp>
-        <p:nvSpPr>
-          <p:cNvPr id="16" name="Shape 12"/>
-          <p:cNvSpPr/>
-          <p:nvPr/>
-        </p:nvSpPr>
-        <p:spPr>
-          <a:xfrm>
-            <a:off x="457200" y="2926080"/>
-            <a:ext cx="64008" cy="1783080"/>
-          </a:xfrm>
-          <a:prstGeom prst="rect">
-            <a:avLst/>
-          </a:prstGeom>
-          <a:solidFill>
-            <a:srgbClr val="C0392B"/>
-          </a:solidFill>
-          <a:ln/>
-        </p:spPr>
-      </p:sp>
-      <p:sp>
-        <p:nvSpPr>
-          <p:cNvPr id="17" name="Shape 13"/>
-          <p:cNvSpPr/>
-          <p:nvPr/>
-        </p:nvSpPr>
-        <p:spPr>
-          <a:xfrm>
-            <a:off x="685800" y="3154680"/>
-            <a:ext cx="502920" cy="502920"/>
-          </a:xfrm>
-          <a:prstGeom prst="ellipse">
-            <a:avLst/>
-          </a:prstGeom>
-          <a:solidFill>
-            <a:srgbClr val="C0392B"/>
-          </a:solidFill>
-          <a:ln/>
-        </p:spPr>
-      </p:sp>
-      <p:pic>
-        <p:nvPicPr>
-          <p:cNvPr id="18" name="Image 2" descr="preencoded.png">    </p:cNvPr>
+          <p:cNvPr id="6" name="Image 0" descr="preencoded.png"/>
           <p:cNvPicPr>
             <a:picLocks noChangeAspect="1"/>
           </p:cNvPicPr>
@@ -3805,7 +3344,7 @@
         </p:blipFill>
         <p:spPr>
           <a:xfrm>
-            <a:off x="816559" y="3285439"/>
+            <a:off x="816559" y="1273759"/>
             <a:ext cx="241402" cy="241402"/>
           </a:xfrm>
           <a:prstGeom prst="rect">
@@ -3815,13 +3354,13 @@
       </p:pic>
       <p:sp>
         <p:nvSpPr>
-          <p:cNvPr id="19" name="Text 14"/>
-          <p:cNvSpPr/>
-          <p:nvPr/>
-        </p:nvSpPr>
-        <p:spPr>
-          <a:xfrm>
-            <a:off x="1353312" y="3200400"/>
+          <p:cNvPr id="7" name="Text 4"/>
+          <p:cNvSpPr/>
+          <p:nvPr/>
+        </p:nvSpPr>
+        <p:spPr>
+          <a:xfrm>
+            <a:off x="1353312" y="1188720"/>
             <a:ext cx="3017520" cy="384048"/>
           </a:xfrm>
           <a:prstGeom prst="rect">
@@ -3834,7 +3373,7 @@
           <a:bodyPr wrap="square" lIns="0" tIns="0" rIns="0" bIns="0" rtlCol="0" anchor="ctr"/>
           <a:lstStyle/>
           <a:p>
-            <a:pPr indent="0" marL="0">
+            <a:pPr marL="0" indent="0">
               <a:buNone/>
             </a:pPr>
             <a:r>
@@ -3846,7 +3385,7 @@
                 <a:ea typeface="Calibri" pitchFamily="34" charset="-122"/>
                 <a:cs typeface="Calibri" pitchFamily="34" charset="-120"/>
               </a:rPr>
-              <a:t>Strata  L</a:t>
+              <a:t>Portfel  x</a:t>
             </a:r>
             <a:endParaRPr lang="en-US" sz="1650" dirty="0"/>
           </a:p>
@@ -3854,13 +3393,13 @@
       </p:sp>
       <p:sp>
         <p:nvSpPr>
-          <p:cNvPr id="20" name="Text 15"/>
-          <p:cNvSpPr/>
-          <p:nvPr/>
-        </p:nvSpPr>
-        <p:spPr>
-          <a:xfrm>
-            <a:off x="731520" y="3767328"/>
+          <p:cNvPr id="8" name="Text 5"/>
+          <p:cNvSpPr/>
+          <p:nvPr/>
+        </p:nvSpPr>
+        <p:spPr>
+          <a:xfrm>
+            <a:off x="731520" y="1755648"/>
             <a:ext cx="3611880" cy="868680"/>
           </a:xfrm>
           <a:prstGeom prst="rect">
@@ -3873,7 +3412,7 @@
           <a:bodyPr wrap="square" lIns="0" tIns="0" rIns="0" bIns="0" rtlCol="0" anchor="ctr"/>
           <a:lstStyle/>
           <a:p>
-            <a:pPr indent="0" marL="0">
+            <a:pPr marL="0" indent="0">
               <a:buNone/>
             </a:pPr>
             <a:r>
@@ -3885,11 +3424,8 @@
                 <a:ea typeface="Calibri" pitchFamily="34" charset="-122"/>
                 <a:cs typeface="Calibri" pitchFamily="34" charset="-120"/>
               </a:rPr>
-              <a:t>Zysk ze znakiem minus: </a:t>
-            </a:r>
-            <a:pPr indent="0" marL="0">
-              <a:buNone/>
-            </a:pPr>
+              <a:t>Wektor x mówi, ile sztuk każdej akcji kupujemy. Wartość portfela: </a:t>
+            </a:r>
             <a:r>
               <a:rPr lang="en-US" sz="1250" b="1" dirty="0">
                 <a:solidFill>
@@ -3899,11 +3435,8 @@
                 <a:ea typeface="Calibri" pitchFamily="34" charset="-122"/>
                 <a:cs typeface="Calibri" pitchFamily="34" charset="-120"/>
               </a:rPr>
-              <a:t>L(x) = −(Vₜ − V₀)</a:t>
-            </a:r>
-            <a:pPr indent="0" marL="0">
-              <a:buNone/>
-            </a:pPr>
+              <a:t>Vₜ(x) = Σ xᵢ·Sᵢₜ</a:t>
+            </a:r>
             <a:r>
               <a:rPr lang="en-US" sz="1250" dirty="0">
                 <a:solidFill>
@@ -3913,7 +3446,7 @@
                 <a:ea typeface="Calibri" pitchFamily="34" charset="-122"/>
                 <a:cs typeface="Calibri" pitchFamily="34" charset="-120"/>
               </a:rPr>
-              <a:t>.  Dodatnia strata = portfel stracił na wartości.</a:t>
+              <a:t> (cena × ilość).</a:t>
             </a:r>
             <a:endParaRPr lang="en-US" sz="1250" dirty="0"/>
           </a:p>
@@ -3921,13 +3454,13 @@
       </p:sp>
       <p:sp>
         <p:nvSpPr>
-          <p:cNvPr id="21" name="Shape 16"/>
-          <p:cNvSpPr/>
-          <p:nvPr/>
-        </p:nvSpPr>
-        <p:spPr>
-          <a:xfrm>
-            <a:off x="4663440" y="2926080"/>
+          <p:cNvPr id="9" name="Shape 6"/>
+          <p:cNvSpPr/>
+          <p:nvPr/>
+        </p:nvSpPr>
+        <p:spPr>
+          <a:xfrm>
+            <a:off x="4663440" y="914400"/>
             <a:ext cx="4023360" cy="1783080"/>
           </a:xfrm>
           <a:prstGeom prst="rect">
@@ -3938,50 +3471,71 @@
           </a:solidFill>
           <a:ln/>
         </p:spPr>
-      </p:sp>
-      <p:sp>
-        <p:nvSpPr>
-          <p:cNvPr id="22" name="Shape 17"/>
-          <p:cNvSpPr/>
-          <p:nvPr/>
-        </p:nvSpPr>
-        <p:spPr>
-          <a:xfrm>
-            <a:off x="4663440" y="2926080"/>
+        <p:txBody>
+          <a:bodyPr/>
+          <a:lstStyle/>
+          <a:p>
+            <a:endParaRPr lang="pl-PL"/>
+          </a:p>
+        </p:txBody>
+      </p:sp>
+      <p:sp>
+        <p:nvSpPr>
+          <p:cNvPr id="10" name="Shape 7"/>
+          <p:cNvSpPr/>
+          <p:nvPr/>
+        </p:nvSpPr>
+        <p:spPr>
+          <a:xfrm>
+            <a:off x="4663440" y="914400"/>
             <a:ext cx="64008" cy="1783080"/>
           </a:xfrm>
           <a:prstGeom prst="rect">
             <a:avLst/>
           </a:prstGeom>
           <a:solidFill>
-            <a:srgbClr val="6B7280"/>
+            <a:srgbClr val="2C7A4B"/>
           </a:solidFill>
           <a:ln/>
         </p:spPr>
-      </p:sp>
-      <p:sp>
-        <p:nvSpPr>
-          <p:cNvPr id="23" name="Shape 18"/>
-          <p:cNvSpPr/>
-          <p:nvPr/>
-        </p:nvSpPr>
-        <p:spPr>
-          <a:xfrm>
-            <a:off x="4892040" y="3154680"/>
+        <p:txBody>
+          <a:bodyPr/>
+          <a:lstStyle/>
+          <a:p>
+            <a:endParaRPr lang="pl-PL"/>
+          </a:p>
+        </p:txBody>
+      </p:sp>
+      <p:sp>
+        <p:nvSpPr>
+          <p:cNvPr id="11" name="Shape 8"/>
+          <p:cNvSpPr/>
+          <p:nvPr/>
+        </p:nvSpPr>
+        <p:spPr>
+          <a:xfrm>
+            <a:off x="4892040" y="1143000"/>
             <a:ext cx="502920" cy="502920"/>
           </a:xfrm>
           <a:prstGeom prst="ellipse">
             <a:avLst/>
           </a:prstGeom>
           <a:solidFill>
-            <a:srgbClr val="6B7280"/>
+            <a:srgbClr val="2C7A4B"/>
           </a:solidFill>
           <a:ln/>
         </p:spPr>
+        <p:txBody>
+          <a:bodyPr/>
+          <a:lstStyle/>
+          <a:p>
+            <a:endParaRPr lang="pl-PL"/>
+          </a:p>
+        </p:txBody>
       </p:sp>
       <p:pic>
         <p:nvPicPr>
-          <p:cNvPr id="24" name="Image 3" descr="preencoded.png">    </p:cNvPr>
+          <p:cNvPr id="12" name="Image 1" descr="preencoded.png"/>
           <p:cNvPicPr>
             <a:picLocks noChangeAspect="1"/>
           </p:cNvPicPr>
@@ -3995,7 +3549,7 @@
         </p:blipFill>
         <p:spPr>
           <a:xfrm>
-            <a:off x="5022799" y="3285439"/>
+            <a:off x="5022799" y="1273759"/>
             <a:ext cx="241402" cy="241402"/>
           </a:xfrm>
           <a:prstGeom prst="rect">
@@ -4005,13 +3559,13 @@
       </p:pic>
       <p:sp>
         <p:nvSpPr>
-          <p:cNvPr id="25" name="Text 19"/>
-          <p:cNvSpPr/>
-          <p:nvPr/>
-        </p:nvSpPr>
-        <p:spPr>
-          <a:xfrm>
-            <a:off x="5559552" y="3200400"/>
+          <p:cNvPr id="13" name="Text 9"/>
+          <p:cNvSpPr/>
+          <p:nvPr/>
+        </p:nvSpPr>
+        <p:spPr>
+          <a:xfrm>
+            <a:off x="5559552" y="1188720"/>
             <a:ext cx="3017520" cy="384048"/>
           </a:xfrm>
           <a:prstGeom prst="rect">
@@ -4024,7 +3578,7 @@
           <a:bodyPr wrap="square" lIns="0" tIns="0" rIns="0" bIns="0" rtlCol="0" anchor="ctr"/>
           <a:lstStyle/>
           <a:p>
-            <a:pPr indent="0" marL="0">
+            <a:pPr marL="0" indent="0">
               <a:buNone/>
             </a:pPr>
             <a:r>
@@ -4036,7 +3590,7 @@
                 <a:ea typeface="Calibri" pitchFamily="34" charset="-122"/>
                 <a:cs typeface="Calibri" pitchFamily="34" charset="-120"/>
               </a:rPr>
-              <a:t>Zakaz krótkiej sprzedaży</a:t>
+              <a:t>Stopa zwrotu  R</a:t>
             </a:r>
             <a:endParaRPr lang="en-US" sz="1650" dirty="0"/>
           </a:p>
@@ -4044,13 +3598,13 @@
       </p:sp>
       <p:sp>
         <p:nvSpPr>
-          <p:cNvPr id="26" name="Text 20"/>
-          <p:cNvSpPr/>
-          <p:nvPr/>
-        </p:nvSpPr>
-        <p:spPr>
-          <a:xfrm>
-            <a:off x="4937760" y="3767328"/>
+          <p:cNvPr id="14" name="Text 10"/>
+          <p:cNvSpPr/>
+          <p:nvPr/>
+        </p:nvSpPr>
+        <p:spPr>
+          <a:xfrm>
+            <a:off x="4937760" y="1755648"/>
             <a:ext cx="3611880" cy="868680"/>
           </a:xfrm>
           <a:prstGeom prst="rect">
@@ -4063,7 +3617,7 @@
           <a:bodyPr wrap="square" lIns="0" tIns="0" rIns="0" bIns="0" rtlCol="0" anchor="ctr"/>
           <a:lstStyle/>
           <a:p>
-            <a:pPr indent="0" marL="0">
+            <a:pPr marL="0" indent="0">
               <a:buNone/>
             </a:pPr>
             <a:r>
@@ -4075,11 +3629,8 @@
                 <a:ea typeface="Calibri" pitchFamily="34" charset="-122"/>
                 <a:cs typeface="Calibri" pitchFamily="34" charset="-120"/>
               </a:rPr>
-              <a:t>Nie wolno sprzedawać akcji, których nie mamy — wszystkie ilości nieujemne: </a:t>
-            </a:r>
-            <a:pPr indent="0" marL="0">
-              <a:buNone/>
-            </a:pPr>
+              <a:t>Procentowy zysk lub strata na koniec (chwila T): </a:t>
+            </a:r>
             <a:r>
               <a:rPr lang="en-US" sz="1250" b="1" dirty="0">
                 <a:solidFill>
@@ -4089,11 +3640,418 @@
                 <a:ea typeface="Calibri" pitchFamily="34" charset="-122"/>
                 <a:cs typeface="Calibri" pitchFamily="34" charset="-120"/>
               </a:rPr>
-              <a:t>x ≥ 0</a:t>
-            </a:r>
-            <a:pPr indent="0" marL="0">
+              <a:t>R = (Vₜ − V₀) / V₀</a:t>
+            </a:r>
+            <a:r>
+              <a:rPr lang="en-US" sz="1250" dirty="0">
+                <a:solidFill>
+                  <a:srgbClr val="23272F"/>
+                </a:solidFill>
+                <a:latin typeface="Calibri" pitchFamily="34" charset="0"/>
+                <a:ea typeface="Calibri" pitchFamily="34" charset="-122"/>
+                <a:cs typeface="Calibri" pitchFamily="34" charset="-120"/>
+              </a:rPr>
+              <a:t>.  Żądamy, by jej wartość oczekiwana wynosiła rₑ.</a:t>
+            </a:r>
+            <a:endParaRPr lang="en-US" sz="1250" dirty="0"/>
+          </a:p>
+        </p:txBody>
+      </p:sp>
+      <p:sp>
+        <p:nvSpPr>
+          <p:cNvPr id="15" name="Shape 11"/>
+          <p:cNvSpPr/>
+          <p:nvPr/>
+        </p:nvSpPr>
+        <p:spPr>
+          <a:xfrm>
+            <a:off x="457200" y="2926080"/>
+            <a:ext cx="4023360" cy="1783080"/>
+          </a:xfrm>
+          <a:prstGeom prst="rect">
+            <a:avLst/>
+          </a:prstGeom>
+          <a:solidFill>
+            <a:srgbClr val="EAF1FE"/>
+          </a:solidFill>
+          <a:ln/>
+        </p:spPr>
+        <p:txBody>
+          <a:bodyPr/>
+          <a:lstStyle/>
+          <a:p>
+            <a:endParaRPr lang="pl-PL"/>
+          </a:p>
+        </p:txBody>
+      </p:sp>
+      <p:sp>
+        <p:nvSpPr>
+          <p:cNvPr id="16" name="Shape 12"/>
+          <p:cNvSpPr/>
+          <p:nvPr/>
+        </p:nvSpPr>
+        <p:spPr>
+          <a:xfrm>
+            <a:off x="457200" y="2926080"/>
+            <a:ext cx="64008" cy="1783080"/>
+          </a:xfrm>
+          <a:prstGeom prst="rect">
+            <a:avLst/>
+          </a:prstGeom>
+          <a:solidFill>
+            <a:srgbClr val="C0392B"/>
+          </a:solidFill>
+          <a:ln/>
+        </p:spPr>
+        <p:txBody>
+          <a:bodyPr/>
+          <a:lstStyle/>
+          <a:p>
+            <a:endParaRPr lang="pl-PL"/>
+          </a:p>
+        </p:txBody>
+      </p:sp>
+      <p:sp>
+        <p:nvSpPr>
+          <p:cNvPr id="17" name="Shape 13"/>
+          <p:cNvSpPr/>
+          <p:nvPr/>
+        </p:nvSpPr>
+        <p:spPr>
+          <a:xfrm>
+            <a:off x="685800" y="3154680"/>
+            <a:ext cx="502920" cy="502920"/>
+          </a:xfrm>
+          <a:prstGeom prst="ellipse">
+            <a:avLst/>
+          </a:prstGeom>
+          <a:solidFill>
+            <a:srgbClr val="C0392B"/>
+          </a:solidFill>
+          <a:ln/>
+        </p:spPr>
+        <p:txBody>
+          <a:bodyPr/>
+          <a:lstStyle/>
+          <a:p>
+            <a:endParaRPr lang="pl-PL"/>
+          </a:p>
+        </p:txBody>
+      </p:sp>
+      <p:pic>
+        <p:nvPicPr>
+          <p:cNvPr id="18" name="Image 2" descr="preencoded.png"/>
+          <p:cNvPicPr>
+            <a:picLocks noChangeAspect="1"/>
+          </p:cNvPicPr>
+          <p:nvPr/>
+        </p:nvPicPr>
+        <p:blipFill>
+          <a:blip r:embed="rId5"/>
+          <a:stretch>
+            <a:fillRect/>
+          </a:stretch>
+        </p:blipFill>
+        <p:spPr>
+          <a:xfrm>
+            <a:off x="816559" y="3285439"/>
+            <a:ext cx="241402" cy="241402"/>
+          </a:xfrm>
+          <a:prstGeom prst="rect">
+            <a:avLst/>
+          </a:prstGeom>
+        </p:spPr>
+      </p:pic>
+      <p:sp>
+        <p:nvSpPr>
+          <p:cNvPr id="19" name="Text 14"/>
+          <p:cNvSpPr/>
+          <p:nvPr/>
+        </p:nvSpPr>
+        <p:spPr>
+          <a:xfrm>
+            <a:off x="1353312" y="3200400"/>
+            <a:ext cx="3017520" cy="384048"/>
+          </a:xfrm>
+          <a:prstGeom prst="rect">
+            <a:avLst/>
+          </a:prstGeom>
+          <a:noFill/>
+          <a:ln/>
+        </p:spPr>
+        <p:txBody>
+          <a:bodyPr wrap="square" lIns="0" tIns="0" rIns="0" bIns="0" rtlCol="0" anchor="ctr"/>
+          <a:lstStyle/>
+          <a:p>
+            <a:pPr marL="0" indent="0">
               <a:buNone/>
             </a:pPr>
+            <a:r>
+              <a:rPr lang="en-US" sz="1650" b="1" dirty="0">
+                <a:solidFill>
+                  <a:srgbClr val="23272F"/>
+                </a:solidFill>
+                <a:latin typeface="Calibri" pitchFamily="34" charset="0"/>
+                <a:ea typeface="Calibri" pitchFamily="34" charset="-122"/>
+                <a:cs typeface="Calibri" pitchFamily="34" charset="-120"/>
+              </a:rPr>
+              <a:t>Strata  L</a:t>
+            </a:r>
+            <a:endParaRPr lang="en-US" sz="1650" dirty="0"/>
+          </a:p>
+        </p:txBody>
+      </p:sp>
+      <p:sp>
+        <p:nvSpPr>
+          <p:cNvPr id="20" name="Text 15"/>
+          <p:cNvSpPr/>
+          <p:nvPr/>
+        </p:nvSpPr>
+        <p:spPr>
+          <a:xfrm>
+            <a:off x="731520" y="3767328"/>
+            <a:ext cx="3611880" cy="868680"/>
+          </a:xfrm>
+          <a:prstGeom prst="rect">
+            <a:avLst/>
+          </a:prstGeom>
+          <a:noFill/>
+          <a:ln/>
+        </p:spPr>
+        <p:txBody>
+          <a:bodyPr wrap="square" lIns="0" tIns="0" rIns="0" bIns="0" rtlCol="0" anchor="ctr"/>
+          <a:lstStyle/>
+          <a:p>
+            <a:pPr marL="0" indent="0">
+              <a:buNone/>
+            </a:pPr>
+            <a:r>
+              <a:rPr lang="en-US" sz="1250" dirty="0">
+                <a:solidFill>
+                  <a:srgbClr val="23272F"/>
+                </a:solidFill>
+                <a:latin typeface="Calibri" pitchFamily="34" charset="0"/>
+                <a:ea typeface="Calibri" pitchFamily="34" charset="-122"/>
+                <a:cs typeface="Calibri" pitchFamily="34" charset="-120"/>
+              </a:rPr>
+              <a:t>Zysk ze znakiem minus: </a:t>
+            </a:r>
+            <a:r>
+              <a:rPr lang="en-US" sz="1250" b="1" dirty="0">
+                <a:solidFill>
+                  <a:srgbClr val="1E2761"/>
+                </a:solidFill>
+                <a:latin typeface="Calibri" pitchFamily="34" charset="0"/>
+                <a:ea typeface="Calibri" pitchFamily="34" charset="-122"/>
+                <a:cs typeface="Calibri" pitchFamily="34" charset="-120"/>
+              </a:rPr>
+              <a:t>L(x) = −(Vₜ − V₀)</a:t>
+            </a:r>
+            <a:r>
+              <a:rPr lang="en-US" sz="1250" dirty="0">
+                <a:solidFill>
+                  <a:srgbClr val="23272F"/>
+                </a:solidFill>
+                <a:latin typeface="Calibri" pitchFamily="34" charset="0"/>
+                <a:ea typeface="Calibri" pitchFamily="34" charset="-122"/>
+                <a:cs typeface="Calibri" pitchFamily="34" charset="-120"/>
+              </a:rPr>
+              <a:t>.  Dodatnia strata = portfel stracił na wartości.</a:t>
+            </a:r>
+            <a:endParaRPr lang="en-US" sz="1250" dirty="0"/>
+          </a:p>
+        </p:txBody>
+      </p:sp>
+      <p:sp>
+        <p:nvSpPr>
+          <p:cNvPr id="21" name="Shape 16"/>
+          <p:cNvSpPr/>
+          <p:nvPr/>
+        </p:nvSpPr>
+        <p:spPr>
+          <a:xfrm>
+            <a:off x="4663440" y="2926080"/>
+            <a:ext cx="4023360" cy="1783080"/>
+          </a:xfrm>
+          <a:prstGeom prst="rect">
+            <a:avLst/>
+          </a:prstGeom>
+          <a:solidFill>
+            <a:srgbClr val="EAF1FE"/>
+          </a:solidFill>
+          <a:ln/>
+        </p:spPr>
+        <p:txBody>
+          <a:bodyPr/>
+          <a:lstStyle/>
+          <a:p>
+            <a:endParaRPr lang="pl-PL"/>
+          </a:p>
+        </p:txBody>
+      </p:sp>
+      <p:sp>
+        <p:nvSpPr>
+          <p:cNvPr id="22" name="Shape 17"/>
+          <p:cNvSpPr/>
+          <p:nvPr/>
+        </p:nvSpPr>
+        <p:spPr>
+          <a:xfrm>
+            <a:off x="4663440" y="2926080"/>
+            <a:ext cx="64008" cy="1783080"/>
+          </a:xfrm>
+          <a:prstGeom prst="rect">
+            <a:avLst/>
+          </a:prstGeom>
+          <a:solidFill>
+            <a:srgbClr val="6B7280"/>
+          </a:solidFill>
+          <a:ln/>
+        </p:spPr>
+        <p:txBody>
+          <a:bodyPr/>
+          <a:lstStyle/>
+          <a:p>
+            <a:endParaRPr lang="pl-PL"/>
+          </a:p>
+        </p:txBody>
+      </p:sp>
+      <p:sp>
+        <p:nvSpPr>
+          <p:cNvPr id="23" name="Shape 18"/>
+          <p:cNvSpPr/>
+          <p:nvPr/>
+        </p:nvSpPr>
+        <p:spPr>
+          <a:xfrm>
+            <a:off x="4892040" y="3154680"/>
+            <a:ext cx="502920" cy="502920"/>
+          </a:xfrm>
+          <a:prstGeom prst="ellipse">
+            <a:avLst/>
+          </a:prstGeom>
+          <a:solidFill>
+            <a:srgbClr val="6B7280"/>
+          </a:solidFill>
+          <a:ln/>
+        </p:spPr>
+        <p:txBody>
+          <a:bodyPr/>
+          <a:lstStyle/>
+          <a:p>
+            <a:endParaRPr lang="pl-PL"/>
+          </a:p>
+        </p:txBody>
+      </p:sp>
+      <p:pic>
+        <p:nvPicPr>
+          <p:cNvPr id="24" name="Image 3" descr="preencoded.png"/>
+          <p:cNvPicPr>
+            <a:picLocks noChangeAspect="1"/>
+          </p:cNvPicPr>
+          <p:nvPr/>
+        </p:nvPicPr>
+        <p:blipFill>
+          <a:blip r:embed="rId6"/>
+          <a:stretch>
+            <a:fillRect/>
+          </a:stretch>
+        </p:blipFill>
+        <p:spPr>
+          <a:xfrm>
+            <a:off x="5022799" y="3285439"/>
+            <a:ext cx="241402" cy="241402"/>
+          </a:xfrm>
+          <a:prstGeom prst="rect">
+            <a:avLst/>
+          </a:prstGeom>
+        </p:spPr>
+      </p:pic>
+      <p:sp>
+        <p:nvSpPr>
+          <p:cNvPr id="25" name="Text 19"/>
+          <p:cNvSpPr/>
+          <p:nvPr/>
+        </p:nvSpPr>
+        <p:spPr>
+          <a:xfrm>
+            <a:off x="5559552" y="3200400"/>
+            <a:ext cx="3017520" cy="384048"/>
+          </a:xfrm>
+          <a:prstGeom prst="rect">
+            <a:avLst/>
+          </a:prstGeom>
+          <a:noFill/>
+          <a:ln/>
+        </p:spPr>
+        <p:txBody>
+          <a:bodyPr wrap="square" lIns="0" tIns="0" rIns="0" bIns="0" rtlCol="0" anchor="ctr"/>
+          <a:lstStyle/>
+          <a:p>
+            <a:pPr marL="0" indent="0">
+              <a:buNone/>
+            </a:pPr>
+            <a:r>
+              <a:rPr lang="en-US" sz="1650" b="1" dirty="0">
+                <a:solidFill>
+                  <a:srgbClr val="23272F"/>
+                </a:solidFill>
+                <a:latin typeface="Calibri" pitchFamily="34" charset="0"/>
+                <a:ea typeface="Calibri" pitchFamily="34" charset="-122"/>
+                <a:cs typeface="Calibri" pitchFamily="34" charset="-120"/>
+              </a:rPr>
+              <a:t>Zakaz krótkiej sprzedaży</a:t>
+            </a:r>
+            <a:endParaRPr lang="en-US" sz="1650" dirty="0"/>
+          </a:p>
+        </p:txBody>
+      </p:sp>
+      <p:sp>
+        <p:nvSpPr>
+          <p:cNvPr id="26" name="Text 20"/>
+          <p:cNvSpPr/>
+          <p:nvPr/>
+        </p:nvSpPr>
+        <p:spPr>
+          <a:xfrm>
+            <a:off x="4937760" y="3767328"/>
+            <a:ext cx="3611880" cy="868680"/>
+          </a:xfrm>
+          <a:prstGeom prst="rect">
+            <a:avLst/>
+          </a:prstGeom>
+          <a:noFill/>
+          <a:ln/>
+        </p:spPr>
+        <p:txBody>
+          <a:bodyPr wrap="square" lIns="0" tIns="0" rIns="0" bIns="0" rtlCol="0" anchor="ctr"/>
+          <a:lstStyle/>
+          <a:p>
+            <a:pPr marL="0" indent="0">
+              <a:buNone/>
+            </a:pPr>
+            <a:r>
+              <a:rPr lang="en-US" sz="1250" dirty="0">
+                <a:solidFill>
+                  <a:srgbClr val="23272F"/>
+                </a:solidFill>
+                <a:latin typeface="Calibri" pitchFamily="34" charset="0"/>
+                <a:ea typeface="Calibri" pitchFamily="34" charset="-122"/>
+                <a:cs typeface="Calibri" pitchFamily="34" charset="-120"/>
+              </a:rPr>
+              <a:t>Nie wolno sprzedawać akcji, których nie mamy — wszystkie ilości nieujemne: </a:t>
+            </a:r>
+            <a:r>
+              <a:rPr lang="en-US" sz="1250" b="1" dirty="0">
+                <a:solidFill>
+                  <a:srgbClr val="1E2761"/>
+                </a:solidFill>
+                <a:latin typeface="Calibri" pitchFamily="34" charset="0"/>
+                <a:ea typeface="Calibri" pitchFamily="34" charset="-122"/>
+                <a:cs typeface="Calibri" pitchFamily="34" charset="-120"/>
+              </a:rPr>
+              <a:t>x ≥ 0</a:t>
+            </a:r>
             <a:r>
               <a:rPr lang="en-US" sz="1250" dirty="0">
                 <a:solidFill>
@@ -4125,6 +4083,7 @@
         <a:solidFill>
           <a:srgbClr val="FFFFFF"/>
         </a:solidFill>
+        <a:effectLst/>
       </p:bgPr>
     </p:bg>
     <p:spTree>
@@ -4162,7 +4121,7 @@
           <a:bodyPr wrap="square" lIns="0" tIns="0" rIns="0" bIns="0" rtlCol="0" anchor="ctr"/>
           <a:lstStyle/>
           <a:p>
-            <a:pPr indent="0" marL="0">
+            <a:pPr marL="0" indent="0">
               <a:buNone/>
             </a:pPr>
             <a:r>
@@ -4309,9 +4268,27 @@
             <a:tbl>
               <a:tblPr/>
               <a:tblGrid>
-                <a:gridCol w="1280160"/>
-                <a:gridCol w="1280160"/>
-                <a:gridCol w="1280160"/>
+                <a:gridCol w="1280160">
+                  <a:extLst>
+                    <a:ext uri="{9D8B030D-6E8A-4147-A177-3AD203B41FA5}">
+                      <a16:colId xmlns:a16="http://schemas.microsoft.com/office/drawing/2014/main" val="20000"/>
+                    </a:ext>
+                  </a:extLst>
+                </a:gridCol>
+                <a:gridCol w="1280160">
+                  <a:extLst>
+                    <a:ext uri="{9D8B030D-6E8A-4147-A177-3AD203B41FA5}">
+                      <a16:colId xmlns:a16="http://schemas.microsoft.com/office/drawing/2014/main" val="20001"/>
+                    </a:ext>
+                  </a:extLst>
+                </a:gridCol>
+                <a:gridCol w="1280160">
+                  <a:extLst>
+                    <a:ext uri="{9D8B030D-6E8A-4147-A177-3AD203B41FA5}">
+                      <a16:colId xmlns:a16="http://schemas.microsoft.com/office/drawing/2014/main" val="20002"/>
+                    </a:ext>
+                  </a:extLst>
+                </a:gridCol>
               </a:tblGrid>
               <a:tr h="292608">
                 <a:tc>
@@ -4319,7 +4296,7 @@
                     <a:bodyPr/>
                     <a:lstStyle/>
                     <a:p>
-                      <a:pPr algn="ctr" indent="0" marL="0">
+                      <a:pPr marL="0" indent="0" algn="ctr">
                         <a:buNone/>
                       </a:pPr>
                       <a:r>
@@ -4340,7 +4317,7 @@
                       </a:endParaRPr>
                     </a:p>
                   </a:txBody>
-                  <a:tcPr marL="91440" marR="91440" marT="45720" marB="45720" anchor="ctr">
+                  <a:tcPr anchor="ctr">
                     <a:lnL w="6350" cap="flat" cmpd="sng" algn="ctr">
                       <a:solidFill>
                         <a:srgbClr val="B9C6E8"/>
@@ -4387,7 +4364,7 @@
                     <a:bodyPr/>
                     <a:lstStyle/>
                     <a:p>
-                      <a:pPr algn="ctr" indent="0" marL="0">
+                      <a:pPr marL="0" indent="0" algn="ctr">
                         <a:buNone/>
                       </a:pPr>
                       <a:r>
@@ -4408,7 +4385,7 @@
                       </a:endParaRPr>
                     </a:p>
                   </a:txBody>
-                  <a:tcPr marL="91440" marR="91440" marT="45720" marB="45720" anchor="ctr">
+                  <a:tcPr anchor="ctr">
                     <a:lnL w="6350" cap="flat" cmpd="sng" algn="ctr">
                       <a:solidFill>
                         <a:srgbClr val="B9C6E8"/>
@@ -4455,7 +4432,7 @@
                     <a:bodyPr/>
                     <a:lstStyle/>
                     <a:p>
-                      <a:pPr algn="ctr" indent="0" marL="0">
+                      <a:pPr marL="0" indent="0" algn="ctr">
                         <a:buNone/>
                       </a:pPr>
                       <a:r>
@@ -4476,7 +4453,7 @@
                       </a:endParaRPr>
                     </a:p>
                   </a:txBody>
-                  <a:tcPr marL="91440" marR="91440" marT="45720" marB="45720" anchor="ctr">
+                  <a:tcPr anchor="ctr">
                     <a:lnL w="6350" cap="flat" cmpd="sng" algn="ctr">
                       <a:solidFill>
                         <a:srgbClr val="B9C6E8"/>
@@ -4518,6 +4495,11 @@
                     </a:solidFill>
                   </a:tcPr>
                 </a:tc>
+                <a:extLst>
+                  <a:ext uri="{0D108BD9-81ED-4DB2-BD59-A6C34878D82A}">
+                    <a16:rowId xmlns:a16="http://schemas.microsoft.com/office/drawing/2014/main" val="10000"/>
+                  </a:ext>
+                </a:extLst>
               </a:tr>
               <a:tr h="292608">
                 <a:tc>
@@ -4525,7 +4507,7 @@
                     <a:bodyPr/>
                     <a:lstStyle/>
                     <a:p>
-                      <a:pPr algn="ctr" indent="0" marL="0">
+                      <a:pPr marL="0" indent="0" algn="ctr">
                         <a:buNone/>
                       </a:pPr>
                       <a:r>
@@ -4546,7 +4528,7 @@
                       </a:endParaRPr>
                     </a:p>
                   </a:txBody>
-                  <a:tcPr marL="91440" marR="91440" marT="45720" marB="45720" anchor="ctr">
+                  <a:tcPr anchor="ctr">
                     <a:lnL w="6350" cap="flat" cmpd="sng" algn="ctr">
                       <a:solidFill>
                         <a:srgbClr val="B9C6E8"/>
@@ -4590,7 +4572,7 @@
                     <a:bodyPr/>
                     <a:lstStyle/>
                     <a:p>
-                      <a:pPr algn="ctr" indent="0" marL="0">
+                      <a:pPr marL="0" indent="0" algn="ctr">
                         <a:buNone/>
                       </a:pPr>
                       <a:r>
@@ -4611,7 +4593,7 @@
                       </a:endParaRPr>
                     </a:p>
                   </a:txBody>
-                  <a:tcPr marL="91440" marR="91440" marT="45720" marB="45720" anchor="ctr">
+                  <a:tcPr anchor="ctr">
                     <a:lnL w="6350" cap="flat" cmpd="sng" algn="ctr">
                       <a:solidFill>
                         <a:srgbClr val="B9C6E8"/>
@@ -4655,7 +4637,7 @@
                     <a:bodyPr/>
                     <a:lstStyle/>
                     <a:p>
-                      <a:pPr algn="ctr" indent="0" marL="0">
+                      <a:pPr marL="0" indent="0" algn="ctr">
                         <a:buNone/>
                       </a:pPr>
                       <a:r>
@@ -4676,7 +4658,7 @@
                       </a:endParaRPr>
                     </a:p>
                   </a:txBody>
-                  <a:tcPr marL="91440" marR="91440" marT="45720" marB="45720" anchor="ctr">
+                  <a:tcPr anchor="ctr">
                     <a:lnL w="6350" cap="flat" cmpd="sng" algn="ctr">
                       <a:solidFill>
                         <a:srgbClr val="B9C6E8"/>
@@ -4715,6 +4697,11 @@
                     </a:lnB>
                   </a:tcPr>
                 </a:tc>
+                <a:extLst>
+                  <a:ext uri="{0D108BD9-81ED-4DB2-BD59-A6C34878D82A}">
+                    <a16:rowId xmlns:a16="http://schemas.microsoft.com/office/drawing/2014/main" val="10001"/>
+                  </a:ext>
+                </a:extLst>
               </a:tr>
               <a:tr h="292608">
                 <a:tc>
@@ -4722,7 +4709,7 @@
                     <a:bodyPr/>
                     <a:lstStyle/>
                     <a:p>
-                      <a:pPr algn="ctr" indent="0" marL="0">
+                      <a:pPr marL="0" indent="0" algn="ctr">
                         <a:buNone/>
                       </a:pPr>
                       <a:r>
@@ -4743,7 +4730,7 @@
                       </a:endParaRPr>
                     </a:p>
                   </a:txBody>
-                  <a:tcPr marL="91440" marR="91440" marT="45720" marB="45720" anchor="ctr">
+                  <a:tcPr anchor="ctr">
                     <a:lnL w="6350" cap="flat" cmpd="sng" algn="ctr">
                       <a:solidFill>
                         <a:srgbClr val="B9C6E8"/>
@@ -4787,7 +4774,7 @@
                     <a:bodyPr/>
                     <a:lstStyle/>
                     <a:p>
-                      <a:pPr algn="ctr" indent="0" marL="0">
+                      <a:pPr marL="0" indent="0" algn="ctr">
                         <a:buNone/>
                       </a:pPr>
                       <a:r>
@@ -4808,7 +4795,7 @@
                       </a:endParaRPr>
                     </a:p>
                   </a:txBody>
-                  <a:tcPr marL="91440" marR="91440" marT="45720" marB="45720" anchor="ctr">
+                  <a:tcPr anchor="ctr">
                     <a:lnL w="6350" cap="flat" cmpd="sng" algn="ctr">
                       <a:solidFill>
                         <a:srgbClr val="B9C6E8"/>
@@ -4852,7 +4839,7 @@
                     <a:bodyPr/>
                     <a:lstStyle/>
                     <a:p>
-                      <a:pPr algn="ctr" indent="0" marL="0">
+                      <a:pPr marL="0" indent="0" algn="ctr">
                         <a:buNone/>
                       </a:pPr>
                       <a:r>
@@ -4873,7 +4860,7 @@
                       </a:endParaRPr>
                     </a:p>
                   </a:txBody>
-                  <a:tcPr marL="91440" marR="91440" marT="45720" marB="45720" anchor="ctr">
+                  <a:tcPr anchor="ctr">
                     <a:lnL w="6350" cap="flat" cmpd="sng" algn="ctr">
                       <a:solidFill>
                         <a:srgbClr val="B9C6E8"/>
@@ -4912,6 +4899,11 @@
                     </a:lnB>
                   </a:tcPr>
                 </a:tc>
+                <a:extLst>
+                  <a:ext uri="{0D108BD9-81ED-4DB2-BD59-A6C34878D82A}">
+                    <a16:rowId xmlns:a16="http://schemas.microsoft.com/office/drawing/2014/main" val="10002"/>
+                  </a:ext>
+                </a:extLst>
               </a:tr>
               <a:tr h="292608">
                 <a:tc>
@@ -4919,7 +4911,7 @@
                     <a:bodyPr/>
                     <a:lstStyle/>
                     <a:p>
-                      <a:pPr algn="ctr" indent="0" marL="0">
+                      <a:pPr marL="0" indent="0" algn="ctr">
                         <a:buNone/>
                       </a:pPr>
                       <a:r>
@@ -4940,7 +4932,7 @@
                       </a:endParaRPr>
                     </a:p>
                   </a:txBody>
-                  <a:tcPr marL="91440" marR="91440" marT="45720" marB="45720" anchor="ctr">
+                  <a:tcPr anchor="ctr">
                     <a:lnL w="6350" cap="flat" cmpd="sng" algn="ctr">
                       <a:solidFill>
                         <a:srgbClr val="B9C6E8"/>
@@ -4984,7 +4976,7 @@
                     <a:bodyPr/>
                     <a:lstStyle/>
                     <a:p>
-                      <a:pPr algn="ctr" indent="0" marL="0">
+                      <a:pPr marL="0" indent="0" algn="ctr">
                         <a:buNone/>
                       </a:pPr>
                       <a:r>
@@ -5005,7 +4997,7 @@
                       </a:endParaRPr>
                     </a:p>
                   </a:txBody>
-                  <a:tcPr marL="91440" marR="91440" marT="45720" marB="45720" anchor="ctr">
+                  <a:tcPr anchor="ctr">
                     <a:lnL w="6350" cap="flat" cmpd="sng" algn="ctr">
                       <a:solidFill>
                         <a:srgbClr val="B9C6E8"/>
@@ -5049,7 +5041,7 @@
                     <a:bodyPr/>
                     <a:lstStyle/>
                     <a:p>
-                      <a:pPr algn="ctr" indent="0" marL="0">
+                      <a:pPr marL="0" indent="0" algn="ctr">
                         <a:buNone/>
                       </a:pPr>
                       <a:r>
@@ -5070,7 +5062,7 @@
                       </a:endParaRPr>
                     </a:p>
                   </a:txBody>
-                  <a:tcPr marL="91440" marR="91440" marT="45720" marB="45720" anchor="ctr">
+                  <a:tcPr anchor="ctr">
                     <a:lnL w="6350" cap="flat" cmpd="sng" algn="ctr">
                       <a:solidFill>
                         <a:srgbClr val="B9C6E8"/>
@@ -5109,6 +5101,11 @@
                     </a:lnB>
                   </a:tcPr>
                 </a:tc>
+                <a:extLst>
+                  <a:ext uri="{0D108BD9-81ED-4DB2-BD59-A6C34878D82A}">
+                    <a16:rowId xmlns:a16="http://schemas.microsoft.com/office/drawing/2014/main" val="10003"/>
+                  </a:ext>
+                </a:extLst>
               </a:tr>
             </a:tbl>
           </a:graphicData>
@@ -5116,14 +5113,14 @@
       </p:graphicFrame>
       <p:pic>
         <p:nvPicPr>
-          <p:cNvPr id="5" name="Image 0" descr="prez_img/diagram_markowa.png">    </p:cNvPr>
+          <p:cNvPr id="4" name="Image 0" descr="prez_img/diagram_markowa.png"/>
           <p:cNvPicPr>
             <a:picLocks noChangeAspect="1"/>
           </p:cNvPicPr>
           <p:nvPr/>
         </p:nvPicPr>
         <p:blipFill>
-          <a:blip r:embed="rId1"/>
+          <a:blip r:embed="rId3"/>
           <a:stretch>
             <a:fillRect/>
           </a:stretch>
@@ -5157,6 +5154,13 @@
           </a:solidFill>
           <a:ln/>
         </p:spPr>
+        <p:txBody>
+          <a:bodyPr/>
+          <a:lstStyle/>
+          <a:p>
+            <a:endParaRPr lang="pl-PL"/>
+          </a:p>
+        </p:txBody>
       </p:sp>
       <p:sp>
         <p:nvSpPr>
@@ -5179,7 +5183,7 @@
           <a:bodyPr wrap="square" lIns="0" tIns="0" rIns="0" bIns="0" rtlCol="0" anchor="ctr"/>
           <a:lstStyle/>
           <a:p>
-            <a:pPr indent="0" marL="0">
+            <a:pPr marL="0" indent="0">
               <a:buNone/>
             </a:pPr>
             <a:r>
@@ -5199,14 +5203,14 @@
       </p:sp>
       <p:pic>
         <p:nvPicPr>
-          <p:cNvPr id="8" name="Image 1" descr="prez_img/f_cena.png">    </p:cNvPr>
+          <p:cNvPr id="8" name="Image 1" descr="prez_img/f_cena.png"/>
           <p:cNvPicPr>
             <a:picLocks noChangeAspect="1"/>
           </p:cNvPicPr>
           <p:nvPr/>
         </p:nvPicPr>
         <p:blipFill>
-          <a:blip r:embed="rId2"/>
+          <a:blip r:embed="rId4"/>
           <a:stretch>
             <a:fillRect/>
           </a:stretch>
@@ -5237,6 +5241,7 @@
         <a:solidFill>
           <a:srgbClr val="FFFFFF"/>
         </a:solidFill>
+        <a:effectLst/>
       </p:bgPr>
     </p:bg>
     <p:spTree>
@@ -5274,7 +5279,7 @@
           <a:bodyPr wrap="square" lIns="0" tIns="0" rIns="0" bIns="0" rtlCol="0" anchor="ctr"/>
           <a:lstStyle/>
           <a:p>
-            <a:pPr indent="0" marL="0">
+            <a:pPr marL="0" indent="0">
               <a:buNone/>
             </a:pPr>
             <a:r>
@@ -5294,14 +5299,14 @@
       </p:sp>
       <p:pic>
         <p:nvPicPr>
-          <p:cNvPr id="3" name="Image 0" descr="prez_img/trajektorie.png">    </p:cNvPr>
+          <p:cNvPr id="3" name="Image 0" descr="prez_img/trajektorie.png"/>
           <p:cNvPicPr>
             <a:picLocks noChangeAspect="1"/>
           </p:cNvPicPr>
           <p:nvPr/>
         </p:nvPicPr>
         <p:blipFill>
-          <a:blip r:embed="rId1"/>
+          <a:blip r:embed="rId3"/>
           <a:stretch>
             <a:fillRect/>
           </a:stretch>
@@ -5337,7 +5342,7 @@
           <a:bodyPr wrap="square" lIns="0" tIns="0" rIns="0" bIns="0" rtlCol="0" anchor="ctr"/>
           <a:lstStyle/>
           <a:p>
-            <a:pPr indent="0" marL="0">
+            <a:pPr marL="0" indent="0">
               <a:buNone/>
             </a:pPr>
             <a:r>
@@ -5374,6 +5379,13 @@
           </a:solidFill>
           <a:ln/>
         </p:spPr>
+        <p:txBody>
+          <a:bodyPr/>
+          <a:lstStyle/>
+          <a:p>
+            <a:endParaRPr lang="pl-PL"/>
+          </a:p>
+        </p:txBody>
       </p:sp>
       <p:sp>
         <p:nvSpPr>
@@ -5394,6 +5406,13 @@
           </a:solidFill>
           <a:ln/>
         </p:spPr>
+        <p:txBody>
+          <a:bodyPr/>
+          <a:lstStyle/>
+          <a:p>
+            <a:endParaRPr lang="pl-PL"/>
+          </a:p>
+        </p:txBody>
       </p:sp>
       <p:sp>
         <p:nvSpPr>
@@ -5416,7 +5435,7 @@
           <a:bodyPr wrap="square" lIns="0" tIns="0" rIns="0" bIns="0" rtlCol="0" anchor="ctr"/>
           <a:lstStyle/>
           <a:p>
-            <a:pPr indent="0" marL="0">
+            <a:pPr marL="0" indent="0">
               <a:buNone/>
             </a:pPr>
             <a:r>
@@ -5455,7 +5474,7 @@
           <a:bodyPr wrap="square" lIns="0" tIns="0" rIns="0" bIns="0" rtlCol="0" anchor="ctr"/>
           <a:lstStyle/>
           <a:p>
-            <a:pPr indent="0" marL="0">
+            <a:pPr marL="0" indent="0">
               <a:buNone/>
             </a:pPr>
             <a:r>
@@ -5492,6 +5511,13 @@
           </a:solidFill>
           <a:ln/>
         </p:spPr>
+        <p:txBody>
+          <a:bodyPr/>
+          <a:lstStyle/>
+          <a:p>
+            <a:endParaRPr lang="pl-PL"/>
+          </a:p>
+        </p:txBody>
       </p:sp>
       <p:sp>
         <p:nvSpPr>
@@ -5512,6 +5538,13 @@
           </a:solidFill>
           <a:ln/>
         </p:spPr>
+        <p:txBody>
+          <a:bodyPr/>
+          <a:lstStyle/>
+          <a:p>
+            <a:endParaRPr lang="pl-PL"/>
+          </a:p>
+        </p:txBody>
       </p:sp>
       <p:sp>
         <p:nvSpPr>
@@ -5534,7 +5567,7 @@
           <a:bodyPr wrap="square" lIns="0" tIns="0" rIns="0" bIns="0" rtlCol="0" anchor="ctr"/>
           <a:lstStyle/>
           <a:p>
-            <a:pPr indent="0" marL="0">
+            <a:pPr marL="0" indent="0">
               <a:buNone/>
             </a:pPr>
             <a:r>
@@ -5573,7 +5606,7 @@
           <a:bodyPr wrap="square" lIns="0" tIns="0" rIns="0" bIns="0" rtlCol="0" anchor="ctr"/>
           <a:lstStyle/>
           <a:p>
-            <a:pPr indent="0" marL="0">
+            <a:pPr marL="0" indent="0">
               <a:buNone/>
             </a:pPr>
             <a:r>
@@ -5610,6 +5643,13 @@
           </a:solidFill>
           <a:ln/>
         </p:spPr>
+        <p:txBody>
+          <a:bodyPr/>
+          <a:lstStyle/>
+          <a:p>
+            <a:endParaRPr lang="pl-PL"/>
+          </a:p>
+        </p:txBody>
       </p:sp>
       <p:sp>
         <p:nvSpPr>
@@ -5630,6 +5670,13 @@
           </a:solidFill>
           <a:ln/>
         </p:spPr>
+        <p:txBody>
+          <a:bodyPr/>
+          <a:lstStyle/>
+          <a:p>
+            <a:endParaRPr lang="pl-PL"/>
+          </a:p>
+        </p:txBody>
       </p:sp>
       <p:sp>
         <p:nvSpPr>
@@ -5652,7 +5699,7 @@
           <a:bodyPr wrap="square" lIns="0" tIns="0" rIns="0" bIns="0" rtlCol="0" anchor="ctr"/>
           <a:lstStyle/>
           <a:p>
-            <a:pPr indent="0" marL="0">
+            <a:pPr marL="0" indent="0">
               <a:buNone/>
             </a:pPr>
             <a:r>
@@ -5691,7 +5738,7 @@
           <a:bodyPr wrap="square" lIns="0" tIns="0" rIns="0" bIns="0" rtlCol="0" anchor="ctr"/>
           <a:lstStyle/>
           <a:p>
-            <a:pPr indent="0" marL="0">
+            <a:pPr marL="0" indent="0">
               <a:buNone/>
             </a:pPr>
             <a:r>
@@ -5730,7 +5777,7 @@
           <a:bodyPr wrap="square" lIns="0" tIns="0" rIns="0" bIns="0" rtlCol="0" anchor="ctr"/>
           <a:lstStyle/>
           <a:p>
-            <a:pPr indent="0" marL="0">
+            <a:pPr marL="0" indent="0">
               <a:buNone/>
             </a:pPr>
             <a:r>
@@ -5764,6 +5811,7 @@
         <a:solidFill>
           <a:srgbClr val="FFFFFF"/>
         </a:solidFill>
+        <a:effectLst/>
       </p:bgPr>
     </p:bg>
     <p:spTree>
@@ -5801,7 +5849,7 @@
           <a:bodyPr wrap="square" lIns="0" tIns="0" rIns="0" bIns="0" rtlCol="0" anchor="ctr"/>
           <a:lstStyle/>
           <a:p>
-            <a:pPr indent="0" marL="0">
+            <a:pPr marL="0" indent="0">
               <a:buNone/>
             </a:pPr>
             <a:r>
@@ -5821,14 +5869,14 @@
       </p:sp>
       <p:pic>
         <p:nvPicPr>
-          <p:cNvPr id="3" name="Image 0" descr="prez_img/histogram_strat.png">    </p:cNvPr>
+          <p:cNvPr id="3" name="Image 0" descr="prez_img/histogram_strat.png"/>
           <p:cNvPicPr>
             <a:picLocks noChangeAspect="1"/>
           </p:cNvPicPr>
           <p:nvPr/>
         </p:nvPicPr>
         <p:blipFill>
-          <a:blip r:embed="rId1"/>
+          <a:blip r:embed="rId3"/>
           <a:stretch>
             <a:fillRect/>
           </a:stretch>
@@ -5862,6 +5910,13 @@
           </a:solidFill>
           <a:ln/>
         </p:spPr>
+        <p:txBody>
+          <a:bodyPr/>
+          <a:lstStyle/>
+          <a:p>
+            <a:endParaRPr lang="pl-PL"/>
+          </a:p>
+        </p:txBody>
       </p:sp>
       <p:sp>
         <p:nvSpPr>
@@ -5882,6 +5937,13 @@
           </a:solidFill>
           <a:ln/>
         </p:spPr>
+        <p:txBody>
+          <a:bodyPr/>
+          <a:lstStyle/>
+          <a:p>
+            <a:endParaRPr lang="pl-PL"/>
+          </a:p>
+        </p:txBody>
       </p:sp>
       <p:sp>
         <p:nvSpPr>
@@ -5904,7 +5966,7 @@
           <a:bodyPr wrap="square" lIns="0" tIns="0" rIns="0" bIns="0" rtlCol="0" anchor="ctr"/>
           <a:lstStyle/>
           <a:p>
-            <a:pPr indent="0" marL="0">
+            <a:pPr marL="0" indent="0">
               <a:buNone/>
             </a:pPr>
             <a:r>
@@ -5943,7 +6005,7 @@
           <a:bodyPr wrap="square" lIns="0" tIns="0" rIns="0" bIns="0" rtlCol="0" anchor="ctr"/>
           <a:lstStyle/>
           <a:p>
-            <a:pPr indent="0" marL="0">
+            <a:pPr marL="0" indent="0">
               <a:buNone/>
             </a:pPr>
             <a:r>
@@ -5980,6 +6042,13 @@
           </a:solidFill>
           <a:ln/>
         </p:spPr>
+        <p:txBody>
+          <a:bodyPr/>
+          <a:lstStyle/>
+          <a:p>
+            <a:endParaRPr lang="pl-PL"/>
+          </a:p>
+        </p:txBody>
       </p:sp>
       <p:sp>
         <p:nvSpPr>
@@ -6000,6 +6069,13 @@
           </a:solidFill>
           <a:ln/>
         </p:spPr>
+        <p:txBody>
+          <a:bodyPr/>
+          <a:lstStyle/>
+          <a:p>
+            <a:endParaRPr lang="pl-PL"/>
+          </a:p>
+        </p:txBody>
       </p:sp>
       <p:sp>
         <p:nvSpPr>
@@ -6022,7 +6098,7 @@
           <a:bodyPr wrap="square" lIns="0" tIns="0" rIns="0" bIns="0" rtlCol="0" anchor="ctr"/>
           <a:lstStyle/>
           <a:p>
-            <a:pPr indent="0" marL="0">
+            <a:pPr marL="0" indent="0">
               <a:buNone/>
             </a:pPr>
             <a:r>
@@ -6061,7 +6137,7 @@
           <a:bodyPr wrap="square" lIns="0" tIns="0" rIns="0" bIns="0" rtlCol="0" anchor="ctr"/>
           <a:lstStyle/>
           <a:p>
-            <a:pPr indent="0" marL="0">
+            <a:pPr marL="0" indent="0">
               <a:buNone/>
             </a:pPr>
             <a:r>
@@ -6100,7 +6176,7 @@
           <a:bodyPr wrap="square" lIns="0" tIns="0" rIns="0" bIns="0" rtlCol="0" anchor="ctr"/>
           <a:lstStyle/>
           <a:p>
-            <a:pPr indent="0" marL="0">
+            <a:pPr marL="0" indent="0">
               <a:buNone/>
             </a:pPr>
             <a:r>
@@ -6120,14 +6196,14 @@
       </p:sp>
       <p:pic>
         <p:nvPicPr>
-          <p:cNvPr id="13" name="Image 1" descr="prez_img/f_cvar.png">    </p:cNvPr>
+          <p:cNvPr id="13" name="Image 1" descr="prez_img/f_cvar.png"/>
           <p:cNvPicPr>
             <a:picLocks noChangeAspect="1"/>
           </p:cNvPicPr>
           <p:nvPr/>
         </p:nvPicPr>
         <p:blipFill>
-          <a:blip r:embed="rId2"/>
+          <a:blip r:embed="rId4"/>
           <a:stretch>
             <a:fillRect/>
           </a:stretch>
@@ -6158,6 +6234,7 @@
         <a:solidFill>
           <a:srgbClr val="FFFFFF"/>
         </a:solidFill>
+        <a:effectLst/>
       </p:bgPr>
     </p:bg>
     <p:spTree>
@@ -6195,7 +6272,7 @@
           <a:bodyPr wrap="square" lIns="0" tIns="0" rIns="0" bIns="0" rtlCol="0" anchor="ctr"/>
           <a:lstStyle/>
           <a:p>
-            <a:pPr indent="0" marL="0">
+            <a:pPr marL="0" indent="0">
               <a:buNone/>
             </a:pPr>
             <a:r>
@@ -6232,6 +6309,13 @@
           </a:solidFill>
           <a:ln/>
         </p:spPr>
+        <p:txBody>
+          <a:bodyPr/>
+          <a:lstStyle/>
+          <a:p>
+            <a:endParaRPr lang="pl-PL"/>
+          </a:p>
+        </p:txBody>
       </p:sp>
       <p:sp>
         <p:nvSpPr>
@@ -6252,6 +6336,13 @@
           </a:solidFill>
           <a:ln/>
         </p:spPr>
+        <p:txBody>
+          <a:bodyPr/>
+          <a:lstStyle/>
+          <a:p>
+            <a:endParaRPr lang="pl-PL"/>
+          </a:p>
+        </p:txBody>
       </p:sp>
       <p:sp>
         <p:nvSpPr>
@@ -6274,7 +6365,7 @@
           <a:bodyPr wrap="square" lIns="0" tIns="0" rIns="0" bIns="0" rtlCol="0" anchor="ctr"/>
           <a:lstStyle/>
           <a:p>
-            <a:pPr indent="0" marL="0">
+            <a:pPr marL="0" indent="0">
               <a:buNone/>
             </a:pPr>
             <a:r>
@@ -6294,252 +6385,7 @@
       </p:sp>
       <p:pic>
         <p:nvPicPr>
-          <p:cNvPr id="6" name="Image 0" descr="prez_img/f_cel.png">    </p:cNvPr>
-          <p:cNvPicPr>
-            <a:picLocks noChangeAspect="1"/>
-          </p:cNvPicPr>
-          <p:nvPr/>
-        </p:nvPicPr>
-        <p:blipFill>
-          <a:blip r:embed="rId1"/>
-          <a:stretch>
-            <a:fillRect/>
-          </a:stretch>
-        </p:blipFill>
-        <p:spPr>
-          <a:xfrm>
-            <a:off x="878967" y="1371600"/>
-            <a:ext cx="3216402" cy="960120"/>
-          </a:xfrm>
-          <a:prstGeom prst="rect">
-            <a:avLst/>
-          </a:prstGeom>
-        </p:spPr>
-      </p:pic>
-      <p:sp>
-        <p:nvSpPr>
-          <p:cNvPr id="7" name="Shape 4"/>
-          <p:cNvSpPr/>
-          <p:nvPr/>
-        </p:nvSpPr>
-        <p:spPr>
-          <a:xfrm>
-            <a:off x="4617720" y="914400"/>
-            <a:ext cx="4069080" cy="1627632"/>
-          </a:xfrm>
-          <a:prstGeom prst="rect">
-            <a:avLst/>
-          </a:prstGeom>
-          <a:solidFill>
-            <a:srgbClr val="EAF1FE"/>
-          </a:solidFill>
-          <a:ln/>
-        </p:spPr>
-      </p:sp>
-      <p:sp>
-        <p:nvSpPr>
-          <p:cNvPr id="8" name="Shape 5"/>
-          <p:cNvSpPr/>
-          <p:nvPr/>
-        </p:nvSpPr>
-        <p:spPr>
-          <a:xfrm>
-            <a:off x="4617720" y="914400"/>
-            <a:ext cx="64008" cy="1627632"/>
-          </a:xfrm>
-          <a:prstGeom prst="rect">
-            <a:avLst/>
-          </a:prstGeom>
-          <a:solidFill>
-            <a:srgbClr val="C0392B"/>
-          </a:solidFill>
-          <a:ln/>
-        </p:spPr>
-      </p:sp>
-      <p:sp>
-        <p:nvSpPr>
-          <p:cNvPr id="9" name="Text 6"/>
-          <p:cNvSpPr/>
-          <p:nvPr/>
-        </p:nvSpPr>
-        <p:spPr>
-          <a:xfrm>
-            <a:off x="4818888" y="1005840"/>
-            <a:ext cx="3703320" cy="292608"/>
-          </a:xfrm>
-          <a:prstGeom prst="rect">
-            <a:avLst/>
-          </a:prstGeom>
-          <a:noFill/>
-          <a:ln/>
-        </p:spPr>
-        <p:txBody>
-          <a:bodyPr wrap="square" lIns="0" tIns="0" rIns="0" bIns="0" rtlCol="0" anchor="ctr"/>
-          <a:lstStyle/>
-          <a:p>
-            <a:pPr indent="0" marL="0">
-              <a:buNone/>
-            </a:pPr>
-            <a:r>
-              <a:rPr lang="en-US" sz="1300" b="1" dirty="0">
-                <a:solidFill>
-                  <a:srgbClr val="C0392B"/>
-                </a:solidFill>
-                <a:latin typeface="Calibri" pitchFamily="34" charset="0"/>
-                <a:ea typeface="Calibri" pitchFamily="34" charset="-122"/>
-                <a:cs typeface="Calibri" pitchFamily="34" charset="-120"/>
-              </a:rPr>
-              <a:t>TRIK: LINEARYZACJA CZĘŚCI DODATNIEJ (·)⁺</a:t>
-            </a:r>
-            <a:endParaRPr lang="en-US" sz="1300" dirty="0"/>
-          </a:p>
-        </p:txBody>
-      </p:sp>
-      <p:sp>
-        <p:nvSpPr>
-          <p:cNvPr id="10" name="Text 7"/>
-          <p:cNvSpPr/>
-          <p:nvPr/>
-        </p:nvSpPr>
-        <p:spPr>
-          <a:xfrm>
-            <a:off x="4818888" y="1335024"/>
-            <a:ext cx="3703320" cy="548640"/>
-          </a:xfrm>
-          <a:prstGeom prst="rect">
-            <a:avLst/>
-          </a:prstGeom>
-          <a:noFill/>
-          <a:ln/>
-        </p:spPr>
-        <p:txBody>
-          <a:bodyPr wrap="square" lIns="0" tIns="0" rIns="0" bIns="0" rtlCol="0" anchor="ctr"/>
-          <a:lstStyle/>
-          <a:p>
-            <a:pPr indent="0" marL="0">
-              <a:buNone/>
-            </a:pPr>
-            <a:r>
-              <a:rPr lang="en-US" sz="1200" dirty="0">
-                <a:solidFill>
-                  <a:srgbClr val="23272F"/>
-                </a:solidFill>
-                <a:latin typeface="Calibri" pitchFamily="34" charset="0"/>
-                <a:ea typeface="Calibri" pitchFamily="34" charset="-122"/>
-                <a:cs typeface="Calibri" pitchFamily="34" charset="-120"/>
-              </a:rPr>
-              <a:t>Nieliniowy składnik (Lⱼ − β)⁺ zastępują zmienne pomocnicze zⱼ i dwa ograniczenia liniowe:</a:t>
-            </a:r>
-            <a:endParaRPr lang="en-US" sz="1200" dirty="0"/>
-          </a:p>
-        </p:txBody>
-      </p:sp>
-      <p:pic>
-        <p:nvPicPr>
-          <p:cNvPr id="11" name="Image 1" descr="prez_img/f_ogr1.png">    </p:cNvPr>
-          <p:cNvPicPr>
-            <a:picLocks noChangeAspect="1"/>
-          </p:cNvPicPr>
-          <p:nvPr/>
-        </p:nvPicPr>
-        <p:blipFill>
-          <a:blip r:embed="rId2"/>
-          <a:stretch>
-            <a:fillRect/>
-          </a:stretch>
-        </p:blipFill>
-        <p:spPr>
-          <a:xfrm>
-            <a:off x="5121774" y="2029968"/>
-            <a:ext cx="3051829" cy="292608"/>
-          </a:xfrm>
-          <a:prstGeom prst="rect">
-            <a:avLst/>
-          </a:prstGeom>
-        </p:spPr>
-      </p:pic>
-      <p:sp>
-        <p:nvSpPr>
-          <p:cNvPr id="12" name="Shape 8"/>
-          <p:cNvSpPr/>
-          <p:nvPr/>
-        </p:nvSpPr>
-        <p:spPr>
-          <a:xfrm>
-            <a:off x="457200" y="2743200"/>
-            <a:ext cx="2679192" cy="1481328"/>
-          </a:xfrm>
-          <a:prstGeom prst="rect">
-            <a:avLst/>
-          </a:prstGeom>
-          <a:solidFill>
-            <a:srgbClr val="EAF1FE"/>
-          </a:solidFill>
-          <a:ln/>
-        </p:spPr>
-      </p:sp>
-      <p:sp>
-        <p:nvSpPr>
-          <p:cNvPr id="13" name="Shape 9"/>
-          <p:cNvSpPr/>
-          <p:nvPr/>
-        </p:nvSpPr>
-        <p:spPr>
-          <a:xfrm>
-            <a:off x="457200" y="2743200"/>
-            <a:ext cx="64008" cy="1481328"/>
-          </a:xfrm>
-          <a:prstGeom prst="rect">
-            <a:avLst/>
-          </a:prstGeom>
-          <a:solidFill>
-            <a:srgbClr val="1E2761"/>
-          </a:solidFill>
-          <a:ln/>
-        </p:spPr>
-      </p:sp>
-      <p:sp>
-        <p:nvSpPr>
-          <p:cNvPr id="14" name="Text 10"/>
-          <p:cNvSpPr/>
-          <p:nvPr/>
-        </p:nvSpPr>
-        <p:spPr>
-          <a:xfrm>
-            <a:off x="658368" y="2834640"/>
-            <a:ext cx="2313432" cy="292608"/>
-          </a:xfrm>
-          <a:prstGeom prst="rect">
-            <a:avLst/>
-          </a:prstGeom>
-          <a:noFill/>
-          <a:ln/>
-        </p:spPr>
-        <p:txBody>
-          <a:bodyPr wrap="square" lIns="0" tIns="0" rIns="0" bIns="0" rtlCol="0" anchor="ctr"/>
-          <a:lstStyle/>
-          <a:p>
-            <a:pPr indent="0" marL="0">
-              <a:buNone/>
-            </a:pPr>
-            <a:r>
-              <a:rPr lang="en-US" sz="1300" b="1" dirty="0">
-                <a:solidFill>
-                  <a:srgbClr val="1E2761"/>
-                </a:solidFill>
-                <a:latin typeface="Calibri" pitchFamily="34" charset="0"/>
-                <a:ea typeface="Calibri" pitchFamily="34" charset="-122"/>
-                <a:cs typeface="Calibri" pitchFamily="34" charset="-120"/>
-              </a:rPr>
-              <a:t>BUDŻET</a:t>
-            </a:r>
-            <a:endParaRPr lang="en-US" sz="1300" dirty="0"/>
-          </a:p>
-        </p:txBody>
-      </p:sp>
-      <p:pic>
-        <p:nvPicPr>
-          <p:cNvPr id="15" name="Image 2" descr="prez_img/f_ogr2.png">    </p:cNvPr>
+          <p:cNvPr id="6" name="Image 0" descr="prez_img/f_cel.png"/>
           <p:cNvPicPr>
             <a:picLocks noChangeAspect="1"/>
           </p:cNvPicPr>
@@ -6553,8 +6399,8 @@
         </p:blipFill>
         <p:spPr>
           <a:xfrm>
-            <a:off x="1176417" y="3456432"/>
-            <a:ext cx="1231614" cy="292608"/>
+            <a:off x="878967" y="1371600"/>
+            <a:ext cx="3216402" cy="960120"/>
           </a:xfrm>
           <a:prstGeom prst="rect">
             <a:avLst/>
@@ -6563,14 +6409,14 @@
       </p:pic>
       <p:sp>
         <p:nvSpPr>
-          <p:cNvPr id="16" name="Shape 11"/>
-          <p:cNvSpPr/>
-          <p:nvPr/>
-        </p:nvSpPr>
-        <p:spPr>
-          <a:xfrm>
-            <a:off x="3246120" y="2743200"/>
-            <a:ext cx="2679192" cy="1481328"/>
+          <p:cNvPr id="7" name="Shape 4"/>
+          <p:cNvSpPr/>
+          <p:nvPr/>
+        </p:nvSpPr>
+        <p:spPr>
+          <a:xfrm>
+            <a:off x="4617720" y="914400"/>
+            <a:ext cx="4069080" cy="1627632"/>
           </a:xfrm>
           <a:prstGeom prst="rect">
             <a:avLst/>
@@ -6580,37 +6426,51 @@
           </a:solidFill>
           <a:ln/>
         </p:spPr>
-      </p:sp>
-      <p:sp>
-        <p:nvSpPr>
-          <p:cNvPr id="17" name="Shape 12"/>
-          <p:cNvSpPr/>
-          <p:nvPr/>
-        </p:nvSpPr>
-        <p:spPr>
-          <a:xfrm>
-            <a:off x="3246120" y="2743200"/>
-            <a:ext cx="64008" cy="1481328"/>
+        <p:txBody>
+          <a:bodyPr/>
+          <a:lstStyle/>
+          <a:p>
+            <a:endParaRPr lang="pl-PL"/>
+          </a:p>
+        </p:txBody>
+      </p:sp>
+      <p:sp>
+        <p:nvSpPr>
+          <p:cNvPr id="8" name="Shape 5"/>
+          <p:cNvSpPr/>
+          <p:nvPr/>
+        </p:nvSpPr>
+        <p:spPr>
+          <a:xfrm>
+            <a:off x="4617720" y="914400"/>
+            <a:ext cx="64008" cy="1627632"/>
           </a:xfrm>
           <a:prstGeom prst="rect">
             <a:avLst/>
           </a:prstGeom>
           <a:solidFill>
-            <a:srgbClr val="1E2761"/>
+            <a:srgbClr val="C0392B"/>
           </a:solidFill>
           <a:ln/>
         </p:spPr>
-      </p:sp>
-      <p:sp>
-        <p:nvSpPr>
-          <p:cNvPr id="18" name="Text 13"/>
-          <p:cNvSpPr/>
-          <p:nvPr/>
-        </p:nvSpPr>
-        <p:spPr>
-          <a:xfrm>
-            <a:off x="3447288" y="2834640"/>
-            <a:ext cx="2313432" cy="292608"/>
+        <p:txBody>
+          <a:bodyPr/>
+          <a:lstStyle/>
+          <a:p>
+            <a:endParaRPr lang="pl-PL"/>
+          </a:p>
+        </p:txBody>
+      </p:sp>
+      <p:sp>
+        <p:nvSpPr>
+          <p:cNvPr id="9" name="Text 6"/>
+          <p:cNvSpPr/>
+          <p:nvPr/>
+        </p:nvSpPr>
+        <p:spPr>
+          <a:xfrm>
+            <a:off x="4818888" y="1005840"/>
+            <a:ext cx="3703320" cy="292608"/>
           </a:xfrm>
           <a:prstGeom prst="rect">
             <a:avLst/>
@@ -6622,27 +6482,66 @@
           <a:bodyPr wrap="square" lIns="0" tIns="0" rIns="0" bIns="0" rtlCol="0" anchor="ctr"/>
           <a:lstStyle/>
           <a:p>
-            <a:pPr indent="0" marL="0">
+            <a:pPr marL="0" indent="0">
               <a:buNone/>
             </a:pPr>
             <a:r>
               <a:rPr lang="en-US" sz="1300" b="1" dirty="0">
                 <a:solidFill>
-                  <a:srgbClr val="1E2761"/>
+                  <a:srgbClr val="C0392B"/>
                 </a:solidFill>
                 <a:latin typeface="Calibri" pitchFamily="34" charset="0"/>
                 <a:ea typeface="Calibri" pitchFamily="34" charset="-122"/>
                 <a:cs typeface="Calibri" pitchFamily="34" charset="-120"/>
               </a:rPr>
-              <a:t>OCZEKIWANY ZWROT = rₑ</a:t>
+              <a:t>TRIK: LINEARYZACJA CZĘŚCI DODATNIEJ (·)⁺</a:t>
             </a:r>
             <a:endParaRPr lang="en-US" sz="1300" dirty="0"/>
+          </a:p>
+        </p:txBody>
+      </p:sp>
+      <p:sp>
+        <p:nvSpPr>
+          <p:cNvPr id="10" name="Text 7"/>
+          <p:cNvSpPr/>
+          <p:nvPr/>
+        </p:nvSpPr>
+        <p:spPr>
+          <a:xfrm>
+            <a:off x="4818888" y="1335024"/>
+            <a:ext cx="3703320" cy="548640"/>
+          </a:xfrm>
+          <a:prstGeom prst="rect">
+            <a:avLst/>
+          </a:prstGeom>
+          <a:noFill/>
+          <a:ln/>
+        </p:spPr>
+        <p:txBody>
+          <a:bodyPr wrap="square" lIns="0" tIns="0" rIns="0" bIns="0" rtlCol="0" anchor="ctr"/>
+          <a:lstStyle/>
+          <a:p>
+            <a:pPr marL="0" indent="0">
+              <a:buNone/>
+            </a:pPr>
+            <a:r>
+              <a:rPr lang="en-US" sz="1200" dirty="0">
+                <a:solidFill>
+                  <a:srgbClr val="23272F"/>
+                </a:solidFill>
+                <a:latin typeface="Calibri" pitchFamily="34" charset="0"/>
+                <a:ea typeface="Calibri" pitchFamily="34" charset="-122"/>
+                <a:cs typeface="Calibri" pitchFamily="34" charset="-120"/>
+              </a:rPr>
+              <a:t>Nieliniowy składnik (Lⱼ − β)⁺ zastępują zmienne pomocnicze zⱼ i dwa ograniczenia liniowe:</a:t>
+            </a:r>
+            <a:endParaRPr lang="en-US" sz="1200" dirty="0"/>
           </a:p>
         </p:txBody>
       </p:sp>
       <p:pic>
         <p:nvPicPr>
-          <p:cNvPr id="19" name="Image 3" descr="prez_img/f_ogr3.png">    </p:cNvPr>
+          <p:cNvPr id="11" name="Image 1" descr="prez_img/f_ogr1.png"/>
           <p:cNvPicPr>
             <a:picLocks noChangeAspect="1"/>
           </p:cNvPicPr>
@@ -6656,8 +6555,8 @@
         </p:blipFill>
         <p:spPr>
           <a:xfrm>
-            <a:off x="3502626" y="3364992"/>
-            <a:ext cx="2157037" cy="566928"/>
+            <a:off x="5121774" y="2029968"/>
+            <a:ext cx="3051829" cy="292608"/>
           </a:xfrm>
           <a:prstGeom prst="rect">
             <a:avLst/>
@@ -6666,13 +6565,13 @@
       </p:pic>
       <p:sp>
         <p:nvSpPr>
-          <p:cNvPr id="20" name="Shape 14"/>
-          <p:cNvSpPr/>
-          <p:nvPr/>
-        </p:nvSpPr>
-        <p:spPr>
-          <a:xfrm>
-            <a:off x="6007608" y="2743200"/>
+          <p:cNvPr id="12" name="Shape 8"/>
+          <p:cNvSpPr/>
+          <p:nvPr/>
+        </p:nvSpPr>
+        <p:spPr>
+          <a:xfrm>
+            <a:off x="457200" y="2743200"/>
             <a:ext cx="2679192" cy="1481328"/>
           </a:xfrm>
           <a:prstGeom prst="rect">
@@ -6683,16 +6582,23 @@
           </a:solidFill>
           <a:ln/>
         </p:spPr>
-      </p:sp>
-      <p:sp>
-        <p:nvSpPr>
-          <p:cNvPr id="21" name="Shape 15"/>
-          <p:cNvSpPr/>
-          <p:nvPr/>
-        </p:nvSpPr>
-        <p:spPr>
-          <a:xfrm>
-            <a:off x="6007608" y="2743200"/>
+        <p:txBody>
+          <a:bodyPr/>
+          <a:lstStyle/>
+          <a:p>
+            <a:endParaRPr lang="pl-PL"/>
+          </a:p>
+        </p:txBody>
+      </p:sp>
+      <p:sp>
+        <p:nvSpPr>
+          <p:cNvPr id="13" name="Shape 9"/>
+          <p:cNvSpPr/>
+          <p:nvPr/>
+        </p:nvSpPr>
+        <p:spPr>
+          <a:xfrm>
+            <a:off x="457200" y="2743200"/>
             <a:ext cx="64008" cy="1481328"/>
           </a:xfrm>
           <a:prstGeom prst="rect">
@@ -6703,16 +6609,23 @@
           </a:solidFill>
           <a:ln/>
         </p:spPr>
-      </p:sp>
-      <p:sp>
-        <p:nvSpPr>
-          <p:cNvPr id="22" name="Text 16"/>
-          <p:cNvSpPr/>
-          <p:nvPr/>
-        </p:nvSpPr>
-        <p:spPr>
-          <a:xfrm>
-            <a:off x="6208776" y="2834640"/>
+        <p:txBody>
+          <a:bodyPr/>
+          <a:lstStyle/>
+          <a:p>
+            <a:endParaRPr lang="pl-PL"/>
+          </a:p>
+        </p:txBody>
+      </p:sp>
+      <p:sp>
+        <p:nvSpPr>
+          <p:cNvPr id="14" name="Text 10"/>
+          <p:cNvSpPr/>
+          <p:nvPr/>
+        </p:nvSpPr>
+        <p:spPr>
+          <a:xfrm>
+            <a:off x="658368" y="2834640"/>
             <a:ext cx="2313432" cy="292608"/>
           </a:xfrm>
           <a:prstGeom prst="rect">
@@ -6725,7 +6638,7 @@
           <a:bodyPr wrap="square" lIns="0" tIns="0" rIns="0" bIns="0" rtlCol="0" anchor="ctr"/>
           <a:lstStyle/>
           <a:p>
-            <a:pPr indent="0" marL="0">
+            <a:pPr marL="0" indent="0">
               <a:buNone/>
             </a:pPr>
             <a:r>
@@ -6737,7 +6650,7 @@
                 <a:ea typeface="Calibri" pitchFamily="34" charset="-122"/>
                 <a:cs typeface="Calibri" pitchFamily="34" charset="-120"/>
               </a:rPr>
-              <a:t>BEZ KRÓTKIEJ SPRZEDAŻY</a:t>
+              <a:t>BUDŻET</a:t>
             </a:r>
             <a:endParaRPr lang="en-US" sz="1300" dirty="0"/>
           </a:p>
@@ -6745,7 +6658,7 @@
       </p:sp>
       <p:pic>
         <p:nvPicPr>
-          <p:cNvPr id="23" name="Image 4" descr="prez_img/f_ogr4.png">    </p:cNvPr>
+          <p:cNvPr id="15" name="Image 2" descr="prez_img/f_ogr2.png"/>
           <p:cNvPicPr>
             <a:picLocks noChangeAspect="1"/>
           </p:cNvPicPr>
@@ -6759,8 +6672,8 @@
         </p:blipFill>
         <p:spPr>
           <a:xfrm>
-            <a:off x="6999039" y="3456432"/>
-            <a:ext cx="687185" cy="274320"/>
+            <a:off x="1176417" y="3456432"/>
+            <a:ext cx="1231614" cy="292608"/>
           </a:xfrm>
           <a:prstGeom prst="rect">
             <a:avLst/>
@@ -6769,14 +6682,68 @@
       </p:pic>
       <p:sp>
         <p:nvSpPr>
-          <p:cNvPr id="24" name="Text 17"/>
-          <p:cNvSpPr/>
-          <p:nvPr/>
-        </p:nvSpPr>
-        <p:spPr>
-          <a:xfrm>
-            <a:off x="457200" y="4434840"/>
-            <a:ext cx="8229600" cy="365760"/>
+          <p:cNvPr id="16" name="Shape 11"/>
+          <p:cNvSpPr/>
+          <p:nvPr/>
+        </p:nvSpPr>
+        <p:spPr>
+          <a:xfrm>
+            <a:off x="3246120" y="2743200"/>
+            <a:ext cx="2679192" cy="1481328"/>
+          </a:xfrm>
+          <a:prstGeom prst="rect">
+            <a:avLst/>
+          </a:prstGeom>
+          <a:solidFill>
+            <a:srgbClr val="EAF1FE"/>
+          </a:solidFill>
+          <a:ln/>
+        </p:spPr>
+        <p:txBody>
+          <a:bodyPr/>
+          <a:lstStyle/>
+          <a:p>
+            <a:endParaRPr lang="pl-PL"/>
+          </a:p>
+        </p:txBody>
+      </p:sp>
+      <p:sp>
+        <p:nvSpPr>
+          <p:cNvPr id="17" name="Shape 12"/>
+          <p:cNvSpPr/>
+          <p:nvPr/>
+        </p:nvSpPr>
+        <p:spPr>
+          <a:xfrm>
+            <a:off x="3246120" y="2743200"/>
+            <a:ext cx="64008" cy="1481328"/>
+          </a:xfrm>
+          <a:prstGeom prst="rect">
+            <a:avLst/>
+          </a:prstGeom>
+          <a:solidFill>
+            <a:srgbClr val="1E2761"/>
+          </a:solidFill>
+          <a:ln/>
+        </p:spPr>
+        <p:txBody>
+          <a:bodyPr/>
+          <a:lstStyle/>
+          <a:p>
+            <a:endParaRPr lang="pl-PL"/>
+          </a:p>
+        </p:txBody>
+      </p:sp>
+      <p:sp>
+        <p:nvSpPr>
+          <p:cNvPr id="18" name="Text 13"/>
+          <p:cNvSpPr/>
+          <p:nvPr/>
+        </p:nvSpPr>
+        <p:spPr>
+          <a:xfrm>
+            <a:off x="3447288" y="2834640"/>
+            <a:ext cx="2313432" cy="292608"/>
           </a:xfrm>
           <a:prstGeom prst="rect">
             <a:avLst/>
@@ -6788,23 +6755,200 @@
           <a:bodyPr wrap="square" lIns="0" tIns="0" rIns="0" bIns="0" rtlCol="0" anchor="ctr"/>
           <a:lstStyle/>
           <a:p>
-            <a:pPr algn="ctr" indent="0" marL="0">
+            <a:pPr marL="0" indent="0">
               <a:buNone/>
             </a:pPr>
             <a:r>
-              <a:rPr lang="en-US" sz="1300" dirty="0">
-                <a:solidFill>
-                  <a:srgbClr val="23272F"/>
+              <a:rPr lang="en-US" sz="1300" b="1" dirty="0">
+                <a:solidFill>
+                  <a:srgbClr val="1E2761"/>
                 </a:solidFill>
                 <a:latin typeface="Calibri" pitchFamily="34" charset="0"/>
                 <a:ea typeface="Calibri" pitchFamily="34" charset="-122"/>
                 <a:cs typeface="Calibri" pitchFamily="34" charset="-120"/>
               </a:rPr>
-              <a:t>W optimum β* = VaR, a wartość funkcji celu = CVaR.  </a:t>
-            </a:r>
-            <a:pPr algn="ctr" indent="0" marL="0">
+              <a:t>OCZEKIWANY ZWROT = rₑ</a:t>
+            </a:r>
+            <a:endParaRPr lang="en-US" sz="1300" dirty="0"/>
+          </a:p>
+        </p:txBody>
+      </p:sp>
+      <p:pic>
+        <p:nvPicPr>
+          <p:cNvPr id="19" name="Image 3" descr="prez_img/f_ogr3.png"/>
+          <p:cNvPicPr>
+            <a:picLocks noChangeAspect="1"/>
+          </p:cNvPicPr>
+          <p:nvPr/>
+        </p:nvPicPr>
+        <p:blipFill>
+          <a:blip r:embed="rId6"/>
+          <a:stretch>
+            <a:fillRect/>
+          </a:stretch>
+        </p:blipFill>
+        <p:spPr>
+          <a:xfrm>
+            <a:off x="3502626" y="3364992"/>
+            <a:ext cx="2157037" cy="566928"/>
+          </a:xfrm>
+          <a:prstGeom prst="rect">
+            <a:avLst/>
+          </a:prstGeom>
+        </p:spPr>
+      </p:pic>
+      <p:sp>
+        <p:nvSpPr>
+          <p:cNvPr id="20" name="Shape 14"/>
+          <p:cNvSpPr/>
+          <p:nvPr/>
+        </p:nvSpPr>
+        <p:spPr>
+          <a:xfrm>
+            <a:off x="6007608" y="2743200"/>
+            <a:ext cx="2679192" cy="1481328"/>
+          </a:xfrm>
+          <a:prstGeom prst="rect">
+            <a:avLst/>
+          </a:prstGeom>
+          <a:solidFill>
+            <a:srgbClr val="EAF1FE"/>
+          </a:solidFill>
+          <a:ln/>
+        </p:spPr>
+        <p:txBody>
+          <a:bodyPr/>
+          <a:lstStyle/>
+          <a:p>
+            <a:endParaRPr lang="pl-PL"/>
+          </a:p>
+        </p:txBody>
+      </p:sp>
+      <p:sp>
+        <p:nvSpPr>
+          <p:cNvPr id="21" name="Shape 15"/>
+          <p:cNvSpPr/>
+          <p:nvPr/>
+        </p:nvSpPr>
+        <p:spPr>
+          <a:xfrm>
+            <a:off x="6007608" y="2743200"/>
+            <a:ext cx="64008" cy="1481328"/>
+          </a:xfrm>
+          <a:prstGeom prst="rect">
+            <a:avLst/>
+          </a:prstGeom>
+          <a:solidFill>
+            <a:srgbClr val="1E2761"/>
+          </a:solidFill>
+          <a:ln/>
+        </p:spPr>
+        <p:txBody>
+          <a:bodyPr/>
+          <a:lstStyle/>
+          <a:p>
+            <a:endParaRPr lang="pl-PL"/>
+          </a:p>
+        </p:txBody>
+      </p:sp>
+      <p:sp>
+        <p:nvSpPr>
+          <p:cNvPr id="22" name="Text 16"/>
+          <p:cNvSpPr/>
+          <p:nvPr/>
+        </p:nvSpPr>
+        <p:spPr>
+          <a:xfrm>
+            <a:off x="6208776" y="2834640"/>
+            <a:ext cx="2313432" cy="292608"/>
+          </a:xfrm>
+          <a:prstGeom prst="rect">
+            <a:avLst/>
+          </a:prstGeom>
+          <a:noFill/>
+          <a:ln/>
+        </p:spPr>
+        <p:txBody>
+          <a:bodyPr wrap="square" lIns="0" tIns="0" rIns="0" bIns="0" rtlCol="0" anchor="ctr"/>
+          <a:lstStyle/>
+          <a:p>
+            <a:pPr marL="0" indent="0">
               <a:buNone/>
             </a:pPr>
+            <a:r>
+              <a:rPr lang="en-US" sz="1300" b="1" dirty="0">
+                <a:solidFill>
+                  <a:srgbClr val="1E2761"/>
+                </a:solidFill>
+                <a:latin typeface="Calibri" pitchFamily="34" charset="0"/>
+                <a:ea typeface="Calibri" pitchFamily="34" charset="-122"/>
+                <a:cs typeface="Calibri" pitchFamily="34" charset="-120"/>
+              </a:rPr>
+              <a:t>BEZ KRÓTKIEJ SPRZEDAŻY</a:t>
+            </a:r>
+            <a:endParaRPr lang="en-US" sz="1300" dirty="0"/>
+          </a:p>
+        </p:txBody>
+      </p:sp>
+      <p:pic>
+        <p:nvPicPr>
+          <p:cNvPr id="23" name="Image 4" descr="prez_img/f_ogr4.png"/>
+          <p:cNvPicPr>
+            <a:picLocks noChangeAspect="1"/>
+          </p:cNvPicPr>
+          <p:nvPr/>
+        </p:nvPicPr>
+        <p:blipFill>
+          <a:blip r:embed="rId7"/>
+          <a:stretch>
+            <a:fillRect/>
+          </a:stretch>
+        </p:blipFill>
+        <p:spPr>
+          <a:xfrm>
+            <a:off x="6999039" y="3456432"/>
+            <a:ext cx="687185" cy="274320"/>
+          </a:xfrm>
+          <a:prstGeom prst="rect">
+            <a:avLst/>
+          </a:prstGeom>
+        </p:spPr>
+      </p:pic>
+      <p:sp>
+        <p:nvSpPr>
+          <p:cNvPr id="24" name="Text 17"/>
+          <p:cNvSpPr/>
+          <p:nvPr/>
+        </p:nvSpPr>
+        <p:spPr>
+          <a:xfrm>
+            <a:off x="457200" y="4434840"/>
+            <a:ext cx="8229600" cy="365760"/>
+          </a:xfrm>
+          <a:prstGeom prst="rect">
+            <a:avLst/>
+          </a:prstGeom>
+          <a:noFill/>
+          <a:ln/>
+        </p:spPr>
+        <p:txBody>
+          <a:bodyPr wrap="square" lIns="0" tIns="0" rIns="0" bIns="0" rtlCol="0" anchor="ctr"/>
+          <a:lstStyle/>
+          <a:p>
+            <a:pPr marL="0" indent="0" algn="ctr">
+              <a:buNone/>
+            </a:pPr>
+            <a:r>
+              <a:rPr lang="en-US" sz="1300" dirty="0">
+                <a:solidFill>
+                  <a:srgbClr val="23272F"/>
+                </a:solidFill>
+                <a:latin typeface="Calibri" pitchFamily="34" charset="0"/>
+                <a:ea typeface="Calibri" pitchFamily="34" charset="-122"/>
+                <a:cs typeface="Calibri" pitchFamily="34" charset="-120"/>
+              </a:rPr>
+              <a:t>W optimum β* = VaR, a wartość funkcji celu = CVaR.  </a:t>
+            </a:r>
             <a:r>
               <a:rPr lang="en-US" sz="1300" i="1" dirty="0">
                 <a:solidFill>
@@ -6836,6 +6980,7 @@
         <a:solidFill>
           <a:srgbClr val="FFFFFF"/>
         </a:solidFill>
+        <a:effectLst/>
       </p:bgPr>
     </p:bg>
     <p:spTree>
@@ -6873,7 +7018,7 @@
           <a:bodyPr wrap="square" lIns="0" tIns="0" rIns="0" bIns="0" rtlCol="0" anchor="ctr"/>
           <a:lstStyle/>
           <a:p>
-            <a:pPr indent="0" marL="0">
+            <a:pPr marL="0" indent="0">
               <a:buNone/>
             </a:pPr>
             <a:r>
@@ -6893,14 +7038,14 @@
       </p:sp>
       <p:pic>
         <p:nvPicPr>
-          <p:cNvPr id="3" name="Image 0" descr="granica_efektywna.png">    </p:cNvPr>
+          <p:cNvPr id="3" name="Image 0" descr="granica_efektywna.png"/>
           <p:cNvPicPr>
             <a:picLocks noChangeAspect="1"/>
           </p:cNvPicPr>
           <p:nvPr/>
         </p:nvPicPr>
         <p:blipFill>
-          <a:blip r:embed="rId1"/>
+          <a:blip r:embed="rId3"/>
           <a:stretch>
             <a:fillRect/>
           </a:stretch>
@@ -7037,6 +7182,7 @@
         <a:solidFill>
           <a:srgbClr val="FFFFFF"/>
         </a:solidFill>
+        <a:effectLst/>
       </p:bgPr>
     </p:bg>
     <p:spTree>
@@ -7074,7 +7220,7 @@
           <a:bodyPr wrap="square" lIns="0" tIns="0" rIns="0" bIns="0" rtlCol="0" anchor="ctr"/>
           <a:lstStyle/>
           <a:p>
-            <a:pPr indent="0" marL="0">
+            <a:pPr marL="0" indent="0">
               <a:buNone/>
             </a:pPr>
             <a:r>
@@ -7094,14 +7240,14 @@
       </p:sp>
       <p:pic>
         <p:nvPicPr>
-          <p:cNvPr id="3" name="Image 0" descr="portfel_kolowy.png">    </p:cNvPr>
+          <p:cNvPr id="3" name="Image 0" descr="portfel_kolowy.png"/>
           <p:cNvPicPr>
             <a:picLocks noChangeAspect="1"/>
           </p:cNvPicPr>
           <p:nvPr/>
         </p:nvPicPr>
         <p:blipFill>
-          <a:blip r:embed="rId1"/>
+          <a:blip r:embed="rId3"/>
           <a:stretch>
             <a:fillRect/>
           </a:stretch>
@@ -7135,6 +7281,13 @@
           </a:solidFill>
           <a:ln/>
         </p:spPr>
+        <p:txBody>
+          <a:bodyPr/>
+          <a:lstStyle/>
+          <a:p>
+            <a:endParaRPr lang="pl-PL"/>
+          </a:p>
+        </p:txBody>
       </p:sp>
       <p:sp>
         <p:nvSpPr>
@@ -7155,6 +7308,13 @@
           </a:solidFill>
           <a:ln/>
         </p:spPr>
+        <p:txBody>
+          <a:bodyPr/>
+          <a:lstStyle/>
+          <a:p>
+            <a:endParaRPr lang="pl-PL"/>
+          </a:p>
+        </p:txBody>
       </p:sp>
       <p:sp>
         <p:nvSpPr>
@@ -7177,7 +7337,7 @@
           <a:bodyPr wrap="square" lIns="0" tIns="0" rIns="0" bIns="0" rtlCol="0" anchor="ctr"/>
           <a:lstStyle/>
           <a:p>
-            <a:pPr indent="0" marL="0">
+            <a:pPr marL="0" indent="0">
               <a:buNone/>
             </a:pPr>
             <a:r>
@@ -7216,7 +7376,7 @@
           <a:bodyPr wrap="square" lIns="0" tIns="0" rIns="0" bIns="0" rtlCol="0" anchor="ctr"/>
           <a:lstStyle/>
           <a:p>
-            <a:pPr indent="0" marL="0">
+            <a:pPr marL="0" indent="0">
               <a:buNone/>
             </a:pPr>
             <a:r>
@@ -7253,6 +7413,13 @@
           </a:solidFill>
           <a:ln/>
         </p:spPr>
+        <p:txBody>
+          <a:bodyPr/>
+          <a:lstStyle/>
+          <a:p>
+            <a:endParaRPr lang="pl-PL"/>
+          </a:p>
+        </p:txBody>
       </p:sp>
       <p:sp>
         <p:nvSpPr>
@@ -7273,6 +7440,13 @@
           </a:solidFill>
           <a:ln/>
         </p:spPr>
+        <p:txBody>
+          <a:bodyPr/>
+          <a:lstStyle/>
+          <a:p>
+            <a:endParaRPr lang="pl-PL"/>
+          </a:p>
+        </p:txBody>
       </p:sp>
       <p:sp>
         <p:nvSpPr>
@@ -7295,7 +7469,7 @@
           <a:bodyPr wrap="square" lIns="0" tIns="0" rIns="0" bIns="0" rtlCol="0" anchor="ctr"/>
           <a:lstStyle/>
           <a:p>
-            <a:pPr indent="0" marL="0">
+            <a:pPr marL="0" indent="0">
               <a:buNone/>
             </a:pPr>
             <a:r>
@@ -7334,7 +7508,7 @@
           <a:bodyPr wrap="square" lIns="0" tIns="0" rIns="0" bIns="0" rtlCol="0" anchor="ctr"/>
           <a:lstStyle/>
           <a:p>
-            <a:pPr indent="0" marL="0">
+            <a:pPr marL="0" indent="0">
               <a:buNone/>
             </a:pPr>
             <a:r>
@@ -7717,4 +7891,319 @@
     </a:ext>
   </a:extLst>
 </a:theme>
+</file>
+
+<file path=ppt/theme/theme2.xml><?xml version="1.0" encoding="utf-8"?>
+<a:theme xmlns:a="http://schemas.openxmlformats.org/drawingml/2006/main" name="Motyw pakietu Office">
+  <a:themeElements>
+    <a:clrScheme name="Pakiet Office">
+      <a:dk1>
+        <a:sysClr val="windowText" lastClr="000000"/>
+      </a:dk1>
+      <a:lt1>
+        <a:sysClr val="window" lastClr="FFFFFF"/>
+      </a:lt1>
+      <a:dk2>
+        <a:srgbClr val="0E2841"/>
+      </a:dk2>
+      <a:lt2>
+        <a:srgbClr val="E8E8E8"/>
+      </a:lt2>
+      <a:accent1>
+        <a:srgbClr val="156082"/>
+      </a:accent1>
+      <a:accent2>
+        <a:srgbClr val="E97132"/>
+      </a:accent2>
+      <a:accent3>
+        <a:srgbClr val="196B24"/>
+      </a:accent3>
+      <a:accent4>
+        <a:srgbClr val="0F9ED5"/>
+      </a:accent4>
+      <a:accent5>
+        <a:srgbClr val="A02B93"/>
+      </a:accent5>
+      <a:accent6>
+        <a:srgbClr val="4EA72E"/>
+      </a:accent6>
+      <a:hlink>
+        <a:srgbClr val="467886"/>
+      </a:hlink>
+      <a:folHlink>
+        <a:srgbClr val="96607D"/>
+      </a:folHlink>
+    </a:clrScheme>
+    <a:fontScheme name="Pakiet Office">
+      <a:majorFont>
+        <a:latin typeface="Aptos Display" panose="02110004020202020204"/>
+        <a:ea typeface=""/>
+        <a:cs typeface=""/>
+        <a:font script="Jpan" typeface="游ゴシック Light"/>
+        <a:font script="Hang" typeface="맑은 고딕"/>
+        <a:font script="Hans" typeface="等线 Light"/>
+        <a:font script="Hant" typeface="新細明體"/>
+        <a:font script="Arab" typeface="Times New Roman"/>
+        <a:font script="Hebr" typeface="Times New Roman"/>
+        <a:font script="Thai" typeface="Angsana New"/>
+        <a:font script="Ethi" typeface="Nyala"/>
+        <a:font script="Beng" typeface="Vrinda"/>
+        <a:font script="Gujr" typeface="Shruti"/>
+        <a:font script="Khmr" typeface="MoolBoran"/>
+        <a:font script="Knda" typeface="Tunga"/>
+        <a:font script="Guru" typeface="Raavi"/>
+        <a:font script="Cans" typeface="Euphemia"/>
+        <a:font script="Cher" typeface="Plantagenet Cherokee"/>
+        <a:font script="Yiii" typeface="Microsoft Yi Baiti"/>
+        <a:font script="Tibt" typeface="Microsoft Himalaya"/>
+        <a:font script="Thaa" typeface="MV Boli"/>
+        <a:font script="Deva" typeface="Mangal"/>
+        <a:font script="Telu" typeface="Gautami"/>
+        <a:font script="Taml" typeface="Latha"/>
+        <a:font script="Syrc" typeface="Estrangelo Edessa"/>
+        <a:font script="Orya" typeface="Kalinga"/>
+        <a:font script="Mlym" typeface="Kartika"/>
+        <a:font script="Laoo" typeface="DokChampa"/>
+        <a:font script="Sinh" typeface="Iskoola Pota"/>
+        <a:font script="Mong" typeface="Mongolian Baiti"/>
+        <a:font script="Viet" typeface="Times New Roman"/>
+        <a:font script="Uigh" typeface="Microsoft Uighur"/>
+        <a:font script="Geor" typeface="Sylfaen"/>
+        <a:font script="Armn" typeface="Arial"/>
+        <a:font script="Bugi" typeface="Leelawadee UI"/>
+        <a:font script="Bopo" typeface="Microsoft JhengHei"/>
+        <a:font script="Java" typeface="Javanese Text"/>
+        <a:font script="Lisu" typeface="Segoe UI"/>
+        <a:font script="Mymr" typeface="Myanmar Text"/>
+        <a:font script="Nkoo" typeface="Ebrima"/>
+        <a:font script="Olck" typeface="Nirmala UI"/>
+        <a:font script="Osma" typeface="Ebrima"/>
+        <a:font script="Phag" typeface="Phagspa"/>
+        <a:font script="Syrn" typeface="Estrangelo Edessa"/>
+        <a:font script="Syrj" typeface="Estrangelo Edessa"/>
+        <a:font script="Syre" typeface="Estrangelo Edessa"/>
+        <a:font script="Sora" typeface="Nirmala UI"/>
+        <a:font script="Tale" typeface="Microsoft Tai Le"/>
+        <a:font script="Talu" typeface="Microsoft New Tai Lue"/>
+        <a:font script="Tfng" typeface="Ebrima"/>
+      </a:majorFont>
+      <a:minorFont>
+        <a:latin typeface="Aptos" panose="02110004020202020204"/>
+        <a:ea typeface=""/>
+        <a:cs typeface=""/>
+        <a:font script="Jpan" typeface="游ゴシック"/>
+        <a:font script="Hang" typeface="맑은 고딕"/>
+        <a:font script="Hans" typeface="等线"/>
+        <a:font script="Hant" typeface="新細明體"/>
+        <a:font script="Arab" typeface="Arial"/>
+        <a:font script="Hebr" typeface="Arial"/>
+        <a:font script="Thai" typeface="Cordia New"/>
+        <a:font script="Ethi" typeface="Nyala"/>
+        <a:font script="Beng" typeface="Vrinda"/>
+        <a:font script="Gujr" typeface="Shruti"/>
+        <a:font script="Khmr" typeface="DaunPenh"/>
+        <a:font script="Knda" typeface="Tunga"/>
+        <a:font script="Guru" typeface="Raavi"/>
+        <a:font script="Cans" typeface="Euphemia"/>
+        <a:font script="Cher" typeface="Plantagenet Cherokee"/>
+        <a:font script="Yiii" typeface="Microsoft Yi Baiti"/>
+        <a:font script="Tibt" typeface="Microsoft Himalaya"/>
+        <a:font script="Thaa" typeface="MV Boli"/>
+        <a:font script="Deva" typeface="Mangal"/>
+        <a:font script="Telu" typeface="Gautami"/>
+        <a:font script="Taml" typeface="Latha"/>
+        <a:font script="Syrc" typeface="Estrangelo Edessa"/>
+        <a:font script="Orya" typeface="Kalinga"/>
+        <a:font script="Mlym" typeface="Kartika"/>
+        <a:font script="Laoo" typeface="DokChampa"/>
+        <a:font script="Sinh" typeface="Iskoola Pota"/>
+        <a:font script="Mong" typeface="Mongolian Baiti"/>
+        <a:font script="Viet" typeface="Arial"/>
+        <a:font script="Uigh" typeface="Microsoft Uighur"/>
+        <a:font script="Geor" typeface="Sylfaen"/>
+        <a:font script="Armn" typeface="Arial"/>
+        <a:font script="Bugi" typeface="Leelawadee UI"/>
+        <a:font script="Bopo" typeface="Microsoft JhengHei"/>
+        <a:font script="Java" typeface="Javanese Text"/>
+        <a:font script="Lisu" typeface="Segoe UI"/>
+        <a:font script="Mymr" typeface="Myanmar Text"/>
+        <a:font script="Nkoo" typeface="Ebrima"/>
+        <a:font script="Olck" typeface="Nirmala UI"/>
+        <a:font script="Osma" typeface="Ebrima"/>
+        <a:font script="Phag" typeface="Phagspa"/>
+        <a:font script="Syrn" typeface="Estrangelo Edessa"/>
+        <a:font script="Syrj" typeface="Estrangelo Edessa"/>
+        <a:font script="Syre" typeface="Estrangelo Edessa"/>
+        <a:font script="Sora" typeface="Nirmala UI"/>
+        <a:font script="Tale" typeface="Microsoft Tai Le"/>
+        <a:font script="Talu" typeface="Microsoft New Tai Lue"/>
+        <a:font script="Tfng" typeface="Ebrima"/>
+      </a:minorFont>
+    </a:fontScheme>
+    <a:fmtScheme name="Pakiet Office">
+      <a:fillStyleLst>
+        <a:solidFill>
+          <a:schemeClr val="phClr"/>
+        </a:solidFill>
+        <a:gradFill rotWithShape="1">
+          <a:gsLst>
+            <a:gs pos="0">
+              <a:schemeClr val="phClr">
+                <a:lumMod val="110000"/>
+                <a:satMod val="105000"/>
+                <a:tint val="67000"/>
+              </a:schemeClr>
+            </a:gs>
+            <a:gs pos="50000">
+              <a:schemeClr val="phClr">
+                <a:lumMod val="105000"/>
+                <a:satMod val="103000"/>
+                <a:tint val="73000"/>
+              </a:schemeClr>
+            </a:gs>
+            <a:gs pos="100000">
+              <a:schemeClr val="phClr">
+                <a:lumMod val="105000"/>
+                <a:satMod val="109000"/>
+                <a:tint val="81000"/>
+              </a:schemeClr>
+            </a:gs>
+          </a:gsLst>
+          <a:lin ang="5400000" scaled="0"/>
+        </a:gradFill>
+        <a:gradFill rotWithShape="1">
+          <a:gsLst>
+            <a:gs pos="0">
+              <a:schemeClr val="phClr">
+                <a:satMod val="103000"/>
+                <a:lumMod val="102000"/>
+                <a:tint val="94000"/>
+              </a:schemeClr>
+            </a:gs>
+            <a:gs pos="50000">
+              <a:schemeClr val="phClr">
+                <a:satMod val="110000"/>
+                <a:lumMod val="100000"/>
+                <a:shade val="100000"/>
+              </a:schemeClr>
+            </a:gs>
+            <a:gs pos="100000">
+              <a:schemeClr val="phClr">
+                <a:lumMod val="99000"/>
+                <a:satMod val="120000"/>
+                <a:shade val="78000"/>
+              </a:schemeClr>
+            </a:gs>
+          </a:gsLst>
+          <a:lin ang="5400000" scaled="0"/>
+        </a:gradFill>
+      </a:fillStyleLst>
+      <a:lnStyleLst>
+        <a:ln w="12700" cap="flat" cmpd="sng" algn="ctr">
+          <a:solidFill>
+            <a:schemeClr val="phClr"/>
+          </a:solidFill>
+          <a:prstDash val="solid"/>
+          <a:miter lim="800000"/>
+        </a:ln>
+        <a:ln w="19050" cap="flat" cmpd="sng" algn="ctr">
+          <a:solidFill>
+            <a:schemeClr val="phClr"/>
+          </a:solidFill>
+          <a:prstDash val="solid"/>
+          <a:miter lim="800000"/>
+        </a:ln>
+        <a:ln w="25400" cap="flat" cmpd="sng" algn="ctr">
+          <a:solidFill>
+            <a:schemeClr val="phClr"/>
+          </a:solidFill>
+          <a:prstDash val="solid"/>
+          <a:miter lim="800000"/>
+        </a:ln>
+      </a:lnStyleLst>
+      <a:effectStyleLst>
+        <a:effectStyle>
+          <a:effectLst/>
+        </a:effectStyle>
+        <a:effectStyle>
+          <a:effectLst/>
+        </a:effectStyle>
+        <a:effectStyle>
+          <a:effectLst>
+            <a:outerShdw blurRad="57150" dist="19050" dir="5400000" algn="ctr" rotWithShape="0">
+              <a:srgbClr val="000000">
+                <a:alpha val="63000"/>
+              </a:srgbClr>
+            </a:outerShdw>
+          </a:effectLst>
+        </a:effectStyle>
+      </a:effectStyleLst>
+      <a:bgFillStyleLst>
+        <a:solidFill>
+          <a:schemeClr val="phClr"/>
+        </a:solidFill>
+        <a:solidFill>
+          <a:schemeClr val="phClr">
+            <a:tint val="95000"/>
+            <a:satMod val="170000"/>
+          </a:schemeClr>
+        </a:solidFill>
+        <a:gradFill rotWithShape="1">
+          <a:gsLst>
+            <a:gs pos="0">
+              <a:schemeClr val="phClr">
+                <a:tint val="93000"/>
+                <a:satMod val="150000"/>
+                <a:shade val="98000"/>
+                <a:lumMod val="102000"/>
+              </a:schemeClr>
+            </a:gs>
+            <a:gs pos="50000">
+              <a:schemeClr val="phClr">
+                <a:tint val="98000"/>
+                <a:satMod val="130000"/>
+                <a:shade val="90000"/>
+                <a:lumMod val="103000"/>
+              </a:schemeClr>
+            </a:gs>
+            <a:gs pos="100000">
+              <a:schemeClr val="phClr">
+                <a:shade val="63000"/>
+                <a:satMod val="120000"/>
+              </a:schemeClr>
+            </a:gs>
+          </a:gsLst>
+          <a:lin ang="5400000" scaled="0"/>
+        </a:gradFill>
+      </a:bgFillStyleLst>
+    </a:fmtScheme>
+  </a:themeElements>
+  <a:objectDefaults>
+    <a:lnDef>
+      <a:spPr/>
+      <a:bodyPr/>
+      <a:lstStyle/>
+      <a:style>
+        <a:lnRef idx="2">
+          <a:schemeClr val="accent1"/>
+        </a:lnRef>
+        <a:fillRef idx="0">
+          <a:schemeClr val="accent1"/>
+        </a:fillRef>
+        <a:effectRef idx="1">
+          <a:schemeClr val="accent1"/>
+        </a:effectRef>
+        <a:fontRef idx="minor">
+          <a:schemeClr val="tx1"/>
+        </a:fontRef>
+      </a:style>
+    </a:lnDef>
+  </a:objectDefaults>
+  <a:extraClrSchemeLst/>
+  <a:extLst>
+    <a:ext uri="{05A4C25C-085E-4340-85A3-A5531E510DB2}">
+      <thm15:themeFamily xmlns:thm15="http://schemas.microsoft.com/office/thememl/2012/main" name="Office Theme" id="{2E142A2C-CD16-42D6-873A-C26D2A0506FA}" vid="{1BDDFF52-6CD6-40A5-AB3C-68EB2F1E4D0A}"/>
+    </a:ext>
+  </a:extLst>
+</a:theme>
 </file>